--- a/deck/Playwright-AI-QA-Workshop.pptx
+++ b/deck/Playwright-AI-QA-Workshop.pptx
@@ -651,7 +651,7 @@
           <a:lstStyle/>
           <a:p>
             <a:r>
-              <a:t>Ask the room for their own version of each of these four - 30 seconds each, this is the slide that buys the rest of the session. The last line is the thesis of the whole deck: AI writing a test is not the bottleneck, trusting it is. Everything you will see after this is machinery for that.</a:t>
+              <a:t>Ask the room for their own version of each of these four - 30 seconds each, this is the slide that buys the rest of the session. The last line is the thesis of the whole deck: AI writing a test is not the bottleneck, trusting it is. Everything after this is machinery for that.</a:t>
             </a:r>
           </a:p>
         </p:txBody>
@@ -721,7 +721,7 @@
           <a:lstStyle/>
           <a:p>
             <a:r>
-              <a:t>Walk left to right, 20 seconds per card. Two things to land: the artefacts passed between phases are files on disk (a scenario file, a page object, a manifest), not chat history - which is what makes one stage re-runnable on its own. And a human reviews the PR; nothing merges itself. This is the same diagram as WORKFLOW.md, where it is Mermaid source with the three decision flows (the block hash, the healer, the planner).</a:t>
+              <a:t>Walk left to right, 20 seconds per card. Three things to land. (1) What passes between phases is files on disk - a scenario file, a page object, a manifest - not chat history, which is what makes one stage re-runnable on its own. (2) Stage 9 is a real stage: the run reports itself to a chat, because the person who needs to know is usually not watching the Actions tab. (3) A human reviews the PR; nothing merges itself. Same diagram as WORKFLOW.md, where it is Mermaid source with the four decision flows.</a:t>
             </a:r>
           </a:p>
         </p:txBody>
@@ -791,7 +791,7 @@
           <a:lstStyle/>
           <a:p>
             <a:r>
-              <a:t>The key idea: the scenario file is the source of truth and the only lever. A generated block's hash is taken from its scenario's text, so changing a test means changing the scenario and re-running stage 2. Hand-editing the spec is overwritten on the next digest - that is a feature, it is what makes the generated half reviewable. If someone asks 'so who wrote this line?' the answer is: outside the managed region, a human.</a:t>
+              <a:t>The key idea: the scenario file is the source of truth and the only lever. A generated block's hash is taken from its scenario's text, so changing a test means changing the scenario and re-running stage 2. Hand-editing the spec is overwritten on the next digest - that is a feature, it is what makes the generated half reviewable. If someone asks 'so who wrote this line?' the answer is: outside the managed region, a human. The four verdicts are the words the run summary uses, so the slide and the report agree.</a:t>
             </a:r>
           </a:p>
         </p:txBody>
@@ -861,7 +861,7 @@
           <a:lstStyle/>
           <a:p>
             <a:r>
-              <a:t>This is the rule that surprises people. No expect() in a spec, ever - it is checked by a self-check that fails the build. The reason is not style: the page object is the capability index, and the classifier asks 'can the page objects express this scenario?'. An assertion hand-rolled in a spec is invisible to that question, so the scenario looks satisfied while the capability is still missing. Assertions in the POM turn a missing capability into a visible build order.</a:t>
+              <a:t>This is the rule that surprises people. No expect() in a spec, ever - it is checked by a self-check that fails the build. The reason is not style: the page object is the capability index, and the classifier asks 'can the page objects express this scenario?'. An assertion hand-rolled in a spec is invisible to that question, so the scenario looks satisfied while the capability is still missing. Assertions in the POM turn a missing capability into a visible build order. Two later fixes belong here: a blocked scenario must NAME what to add (an empty list was a dead end), and private members are not capabilities - advertising one made the model call something a spec legally cannot call.</a:t>
             </a:r>
           </a:p>
         </p:txBody>
@@ -931,7 +931,7 @@
           <a:lstStyle/>
           <a:p>
             <a:r>
-              <a:t>The dangerous failure mode here is not red, it is a smaller green run. Three separate defences: tags written by the machinery from the scenario file (never trusted to the model), selection by tag rather than by title, and the planner failing open with an enforced floor. If you take one habit away: when a run is green, ask what it did not run.</a:t>
+              <a:t>The dangerous failure mode here is not red, it is a smaller green run. Four defences: tags written by the machinery from the scenario file, a planner agent that only proposes a scope while the code turns it into the filter, selection by tag rather than by title, and the planner failing open with an enforced floor. And one deliberate exception: a human can override the whole thing with TEST_GREP, which skips the agent and steps around the floor - because the human is the merge gate - but the report then says the run was overridden and names anything it left out. If you take one habit away: when a run is green, ask what it did not run.</a:t>
             </a:r>
           </a:p>
         </p:txBody>
@@ -1141,7 +1141,7 @@
           <a:lstStyle/>
           <a:p>
             <a:r>
-              <a:t>The one-slide summary of the division of labour. If the room remembers one thing from the workshop, make it this table: the left column is where AI adds value, the right column is why you can trust the left. Note that nothing in the right column is a sentence we asked the model to follow - each is code that runs whether the model cooperates or not.</a:t>
+              <a:t>The one-slide summary of the division of labour. If the room remembers one thing from the workshop, make it this table: the left column is where AI adds value, the right column is why you can trust the left. Nothing in the right column is a sentence we asked the model to follow - each is code that runs whether the model cooperates or not. The two-statuses callout is the same idea in the report: a failed test and a broken pipeline are different problems, and one verdict for both sends someone to fix the wrong one.</a:t>
             </a:r>
           </a:p>
         </p:txBody>
@@ -4206,7 +4206,7 @@
             <a:avLst/>
           </a:prstGeom>
           <a:solidFill>
-            <a:srgbClr val="2EAD33"/>
+            <a:srgbClr val="43B7DC"/>
           </a:solidFill>
           <a:ln>
             <a:noFill/>
@@ -4277,7 +4277,7 @@
             <a:r>
               <a:rPr sz="5400" b="0">
                 <a:solidFill>
-                  <a:srgbClr val="2EAD33"/>
+                  <a:srgbClr val="43B7DC"/>
                 </a:solidFill>
                 <a:latin typeface="Segoe UI"/>
               </a:rPr>
@@ -4303,7 +4303,7 @@
               </a:spcAft>
             </a:pPr>
             <a:r>
-              <a:rPr sz="2100" b="0">
+              <a:rPr sz="2200" b="0">
                 <a:solidFill>
                   <a:srgbClr val="C7CED8"/>
                 </a:solidFill>
@@ -4329,7 +4329,7 @@
             <a:avLst/>
           </a:prstGeom>
           <a:solidFill>
-            <a:srgbClr val="2EAD33"/>
+            <a:srgbClr val="43B7DC"/>
           </a:solidFill>
           <a:ln>
             <a:noFill/>
@@ -4366,7 +4366,7 @@
         </p:nvSpPr>
         <p:spPr>
           <a:xfrm>
-            <a:off x="749808" y="3913632"/>
+            <a:off x="749808" y="3950208"/>
             <a:ext cx="9594799" cy="1280160"/>
           </a:xfrm>
           <a:prstGeom prst="rect">
@@ -4389,7 +4389,7 @@
               </a:spcAft>
             </a:pPr>
             <a:r>
-              <a:rPr sz="1450" b="1">
+              <a:rPr sz="1500" b="1">
                 <a:solidFill>
                   <a:srgbClr val="E7EAF0"/>
                 </a:solidFill>
@@ -4398,7 +4398,7 @@
               <a:t>QA workshop</a:t>
             </a:r>
             <a:r>
-              <a:rPr sz="1450" b="0">
+              <a:rPr sz="1500" b="0">
                 <a:solidFill>
                   <a:srgbClr val="9AA2AE"/>
                 </a:solidFill>
@@ -4417,13 +4417,13 @@
               </a:spcAft>
             </a:pPr>
             <a:r>
-              <a:rPr sz="1450" b="0">
+              <a:rPr sz="1500" b="0">
                 <a:solidFill>
                   <a:srgbClr val="9AA2AE"/>
                 </a:solidFill>
                 <a:latin typeface="Segoe UI"/>
               </a:rPr>
-              <a:t>8 stages · issue in, reviewed PR out · AI proposes, code enforces</a:t>
+              <a:t>9 stages · a deployment in, a reviewed PR out · AI proposes, code enforces</a:t>
             </a:r>
           </a:p>
         </p:txBody>
@@ -4496,7 +4496,7 @@
         </p:nvSpPr>
         <p:spPr>
           <a:xfrm>
-            <a:off x="566928" y="384048"/>
+            <a:off x="566928" y="365760"/>
             <a:ext cx="11057839" cy="658368"/>
           </a:xfrm>
           <a:prstGeom prst="rect">
@@ -4519,7 +4519,7 @@
               </a:spcAft>
             </a:pPr>
             <a:r>
-              <a:rPr sz="2900" b="0">
+              <a:rPr sz="2700" b="0">
                 <a:solidFill>
                   <a:srgbClr val="171B23"/>
                 </a:solidFill>
@@ -4538,9 +4538,9 @@
               </a:spcAft>
             </a:pPr>
             <a:r>
-              <a:rPr sz="1250" b="0">
-                <a:solidFill>
-                  <a:srgbClr val="1E7A22"/>
+              <a:rPr sz="1150" b="0">
+                <a:solidFill>
+                  <a:srgbClr val="9AA2AE"/>
                 </a:solidFill>
                 <a:latin typeface="Segoe UI"/>
               </a:rPr>
@@ -4557,8 +4557,8 @@
         </p:nvSpPr>
         <p:spPr>
           <a:xfrm>
-            <a:off x="566928" y="1060704"/>
-            <a:ext cx="1051560" cy="50292"/>
+            <a:off x="566928" y="1042415"/>
+            <a:ext cx="777240" cy="41148"/>
           </a:xfrm>
           <a:prstGeom prst="roundRect">
             <a:avLst>
@@ -4566,7 +4566,7 @@
             </a:avLst>
           </a:prstGeom>
           <a:solidFill>
-            <a:srgbClr val="2EAD33"/>
+            <a:srgbClr val="43B7DC"/>
           </a:solidFill>
           <a:ln>
             <a:noFill/>
@@ -4603,8 +4603,8 @@
         </p:nvSpPr>
         <p:spPr>
           <a:xfrm>
-            <a:off x="566928" y="1645920"/>
-            <a:ext cx="5277459" cy="3108960"/>
+            <a:off x="566928" y="1463040"/>
+            <a:ext cx="5277459" cy="3035808"/>
           </a:xfrm>
           <a:prstGeom prst="roundRect">
             <a:avLst>
@@ -4651,8 +4651,8 @@
         </p:nvSpPr>
         <p:spPr>
           <a:xfrm>
-            <a:off x="841247" y="1847088"/>
-            <a:ext cx="4728819" cy="2743200"/>
+            <a:off x="841247" y="1664208"/>
+            <a:ext cx="4728819" cy="2697480"/>
           </a:xfrm>
           <a:prstGeom prst="rect">
             <a:avLst/>
@@ -4670,13 +4670,13 @@
                 <a:spcPts val="0"/>
               </a:spcBef>
               <a:spcAft>
-                <a:spcPts val="1000"/>
-              </a:spcAft>
-            </a:pPr>
-            <a:r>
-              <a:rPr sz="1450" b="0">
-                <a:solidFill>
-                  <a:srgbClr val="1E7A22"/>
+                <a:spcPts val="1200"/>
+              </a:spcAft>
+            </a:pPr>
+            <a:r>
+              <a:rPr sz="1400" b="0">
+                <a:solidFill>
+                  <a:srgbClr val="626B7A"/>
                 </a:solidFill>
                 <a:latin typeface="Segoe UI"/>
               </a:rPr>
@@ -4684,7 +4684,7 @@
             </a:r>
           </a:p>
           <a:p>
-            <a:pPr marL="274320" indent="-274320">
+            <a:pPr marL="310896" indent="-310896">
               <a:spcBef>
                 <a:spcPts val="0"/>
               </a:spcBef>
@@ -4694,35 +4694,73 @@
               <a:buNone/>
             </a:pPr>
             <a:r>
-              <a:rPr sz="1250" b="1">
-                <a:solidFill>
-                  <a:srgbClr val="2EAD33"/>
+              <a:rPr sz="1400" b="1">
+                <a:solidFill>
+                  <a:srgbClr val="1C7896"/>
                 </a:solidFill>
                 <a:latin typeface="Segoe UI"/>
               </a:rPr>
               <a:t>▪   </a:t>
             </a:r>
             <a:r>
-              <a:rPr sz="1250" b="1">
+              <a:rPr sz="1400" b="1">
+                <a:solidFill>
+                  <a:srgbClr val="1C7896"/>
+                </a:solidFill>
+                <a:latin typeface="Segoe UI"/>
+              </a:rPr>
+              <a:t>2 domains</a:t>
+            </a:r>
+            <a:r>
+              <a:rPr sz="1400">
                 <a:solidFill>
                   <a:srgbClr val="212630"/>
                 </a:solidFill>
                 <a:latin typeface="Segoe UI"/>
               </a:rPr>
-              <a:t>1 domain</a:t>
-            </a:r>
-            <a:r>
-              <a:rPr sz="1250">
+              <a:t> · 24 scenarios · 24 tests</a:t>
+            </a:r>
+          </a:p>
+          <a:p>
+            <a:pPr marL="310896" indent="-310896">
+              <a:spcBef>
+                <a:spcPts val="0"/>
+              </a:spcBef>
+              <a:spcAft>
+                <a:spcPts val="800"/>
+              </a:spcAft>
+              <a:buNone/>
+            </a:pPr>
+            <a:r>
+              <a:rPr sz="1400" b="1">
+                <a:solidFill>
+                  <a:srgbClr val="1C7896"/>
+                </a:solidFill>
+                <a:latin typeface="Segoe UI"/>
+              </a:rPr>
+              <a:t>▪   </a:t>
+            </a:r>
+            <a:r>
+              <a:rPr sz="1400" b="1">
+                <a:solidFill>
+                  <a:srgbClr val="1C7896"/>
+                </a:solidFill>
+                <a:latin typeface="Segoe UI"/>
+              </a:rPr>
+              <a:t>89 self-check invariants</a:t>
+            </a:r>
+            <a:r>
+              <a:rPr sz="1400">
                 <a:solidFill>
                   <a:srgbClr val="212630"/>
                 </a:solidFill>
                 <a:latin typeface="Segoe UI"/>
               </a:rPr>
-              <a:t> (landing-page) · 12 scenarios · 60 self-check invariants.</a:t>
-            </a:r>
-          </a:p>
-          <a:p>
-            <a:pPr marL="274320" indent="-274320">
+              <a:t> in seconds, no browser</a:t>
+            </a:r>
+          </a:p>
+          <a:p>
+            <a:pPr marL="310896" indent="-310896">
               <a:spcBef>
                 <a:spcPts val="0"/>
               </a:spcBef>
@@ -4732,107 +4770,107 @@
               <a:buNone/>
             </a:pPr>
             <a:r>
-              <a:rPr sz="1250" b="1">
-                <a:solidFill>
-                  <a:srgbClr val="2EAD33"/>
+              <a:rPr sz="1400" b="1">
+                <a:solidFill>
+                  <a:srgbClr val="1C7896"/>
                 </a:solidFill>
                 <a:latin typeface="Segoe UI"/>
               </a:rPr>
               <a:t>▪   </a:t>
             </a:r>
             <a:r>
-              <a:rPr sz="1250" b="1">
+              <a:rPr sz="1400" b="1">
+                <a:solidFill>
+                  <a:srgbClr val="1C7896"/>
+                </a:solidFill>
+                <a:latin typeface="Segoe UI"/>
+              </a:rPr>
+              <a:t>Last run: 24 scenarios, 24 kept</a:t>
+            </a:r>
+            <a:r>
+              <a:rPr sz="1400">
                 <a:solidFill>
                   <a:srgbClr val="212630"/>
                 </a:solidFill>
                 <a:latin typeface="Segoe UI"/>
               </a:rPr>
-              <a:t>Last digest: 12 scenarios → 1 generated, 11 kept </a:t>
-            </a:r>
-            <a:r>
-              <a:rPr sz="1250">
+              <a:t> — nothing needed regenerating</a:t>
+            </a:r>
+          </a:p>
+          <a:p>
+            <a:pPr marL="310896" indent="-310896">
+              <a:spcBef>
+                <a:spcPts val="0"/>
+              </a:spcBef>
+              <a:spcAft>
+                <a:spcPts val="800"/>
+              </a:spcAft>
+              <a:buNone/>
+            </a:pPr>
+            <a:r>
+              <a:rPr sz="1400" b="1">
+                <a:solidFill>
+                  <a:srgbClr val="1C7896"/>
+                </a:solidFill>
+                <a:latin typeface="Segoe UI"/>
+              </a:rPr>
+              <a:t>▪   </a:t>
+            </a:r>
+            <a:r>
+              <a:rPr sz="1400" b="1">
+                <a:solidFill>
+                  <a:srgbClr val="1C7896"/>
+                </a:solidFill>
+                <a:latin typeface="Segoe UI"/>
+              </a:rPr>
+              <a:t>Suite: 23 passed, 1 failed</a:t>
+            </a:r>
+            <a:r>
+              <a:rPr sz="1400">
                 <a:solidFill>
                   <a:srgbClr val="212630"/>
                 </a:solidFill>
                 <a:latin typeface="Segoe UI"/>
               </a:rPr>
-              <a:t>in 2.6s.</a:t>
-            </a:r>
-          </a:p>
-          <a:p>
-            <a:pPr marL="274320" indent="-274320">
+              <a:t> — a real defect: a 276px slot under a 300px widget</a:t>
+            </a:r>
+          </a:p>
+          <a:p>
+            <a:pPr marL="310896" indent="-310896">
               <a:spcBef>
                 <a:spcPts val="0"/>
               </a:spcBef>
               <a:spcAft>
-                <a:spcPts val="800"/>
+                <a:spcPts val="400"/>
               </a:spcAft>
               <a:buNone/>
             </a:pPr>
             <a:r>
-              <a:rPr sz="1250" b="1">
-                <a:solidFill>
-                  <a:srgbClr val="2EAD33"/>
+              <a:rPr sz="1400" b="1">
+                <a:solidFill>
+                  <a:srgbClr val="1C7896"/>
                 </a:solidFill>
                 <a:latin typeface="Segoe UI"/>
               </a:rPr>
               <a:t>▪   </a:t>
             </a:r>
             <a:r>
-              <a:rPr sz="1250" b="1">
+              <a:rPr sz="1400" b="1">
+                <a:solidFill>
+                  <a:srgbClr val="1C7896"/>
+                </a:solidFill>
+                <a:latin typeface="Segoe UI"/>
+              </a:rPr>
+              <a:t>DEBUG=true</a:t>
+            </a:r>
+            <a:r>
+              <a:rPr sz="1400">
                 <a:solidFill>
                   <a:srgbClr val="212630"/>
                 </a:solidFill>
                 <a:latin typeface="Segoe UI"/>
               </a:rPr>
-              <a:t>Suite: 11 passed · 1 failed — </a:t>
-            </a:r>
-            <a:r>
-              <a:rPr sz="1250">
-                <a:solidFill>
-                  <a:srgbClr val="212630"/>
-                </a:solidFill>
-                <a:latin typeface="Segoe UI"/>
-              </a:rPr>
-              <a:t>and the failure is a defect it found: the Turnstile slot is 276px against the 300px widget it declares.</a:t>
-            </a:r>
-          </a:p>
-          <a:p>
-            <a:pPr marL="274320" indent="-274320">
-              <a:spcBef>
-                <a:spcPts val="0"/>
-              </a:spcBef>
-              <a:spcAft>
-                <a:spcPts val="800"/>
-              </a:spcAft>
-              <a:buNone/>
-            </a:pPr>
-            <a:r>
-              <a:rPr sz="1250" b="1">
-                <a:solidFill>
-                  <a:srgbClr val="2EAD33"/>
-                </a:solidFill>
-                <a:latin typeface="Segoe UI"/>
-              </a:rPr>
-              <a:t>▪   </a:t>
-            </a:r>
-            <a:r>
-              <a:rPr sz="1250" b="1">
-                <a:solidFill>
-                  <a:srgbClr val="212630"/>
-                </a:solidFill>
-                <a:latin typeface="Segoe UI"/>
-              </a:rPr>
-              <a:t>DEBUG=true</a:t>
-            </a:r>
-            <a:r>
-              <a:rPr sz="1250">
-                <a:solidFill>
-                  <a:srgbClr val="212630"/>
-                </a:solidFill>
-                <a:latin typeface="Segoe UI"/>
-              </a:rPr>
-              <a:t> narrates a run, AI calls as request/response, long content truncated with an ellipsis.</a:t>
+              <a:t> narrates a run, AI calls as request/response</a:t>
             </a:r>
           </a:p>
         </p:txBody>
@@ -4845,8 +4883,8 @@
         </p:nvSpPr>
         <p:spPr>
           <a:xfrm>
-            <a:off x="6347307" y="1645920"/>
-            <a:ext cx="5277459" cy="3108960"/>
+            <a:off x="6347307" y="1463040"/>
+            <a:ext cx="5277459" cy="3035808"/>
           </a:xfrm>
           <a:prstGeom prst="roundRect">
             <a:avLst>
@@ -4891,8 +4929,8 @@
         </p:nvSpPr>
         <p:spPr>
           <a:xfrm>
-            <a:off x="6621627" y="1874519"/>
-            <a:ext cx="4728819" cy="2651760"/>
+            <a:off x="6621627" y="1700784"/>
+            <a:ext cx="4728819" cy="2560320"/>
           </a:xfrm>
           <a:prstGeom prst="rect">
             <a:avLst/>
@@ -4933,7 +4971,7 @@
               </a:spcAft>
             </a:pPr>
             <a:r>
-              <a:rPr sz="1150" b="0">
+              <a:rPr sz="1200" b="0">
                 <a:solidFill>
                   <a:srgbClr val="E7EAF0"/>
                 </a:solidFill>
@@ -4952,7 +4990,7 @@
               </a:spcAft>
             </a:pPr>
             <a:r>
-              <a:rPr sz="1150" b="0">
+              <a:rPr sz="1200" b="0">
                 <a:solidFill>
                   <a:srgbClr val="E7EAF0"/>
                 </a:solidFill>
@@ -4971,7 +5009,7 @@
               </a:spcAft>
             </a:pPr>
             <a:r>
-              <a:rPr sz="1150" b="0">
+              <a:rPr sz="1200" b="0">
                 <a:solidFill>
                   <a:srgbClr val="E7EAF0"/>
                 </a:solidFill>
@@ -4990,7 +5028,7 @@
               </a:spcAft>
             </a:pPr>
             <a:r>
-              <a:rPr sz="1150" b="0">
+              <a:rPr sz="1200" b="0">
                 <a:solidFill>
                   <a:srgbClr val="E7EAF0"/>
                 </a:solidFill>
@@ -5009,7 +5047,7 @@
               </a:spcAft>
             </a:pPr>
             <a:r>
-              <a:rPr sz="1150" b="0">
+              <a:rPr sz="1200" b="0">
                 <a:solidFill>
                   <a:srgbClr val="E7EAF0"/>
                 </a:solidFill>
@@ -5028,7 +5066,7 @@
               </a:spcAft>
             </a:pPr>
             <a:r>
-              <a:rPr sz="1150" b="0">
+              <a:rPr sz="1200" b="0">
                 <a:solidFill>
                   <a:srgbClr val="E7EAF0"/>
                 </a:solidFill>
@@ -5047,8 +5085,8 @@
         </p:nvSpPr>
         <p:spPr>
           <a:xfrm>
-            <a:off x="566928" y="4956048"/>
-            <a:ext cx="11057839" cy="676656"/>
+            <a:off x="566928" y="4681728"/>
+            <a:ext cx="11057839" cy="713232"/>
           </a:xfrm>
           <a:prstGeom prst="roundRect">
             <a:avLst>
@@ -5093,14 +5131,14 @@
         </p:nvSpPr>
         <p:spPr>
           <a:xfrm>
-            <a:off x="566928" y="4956048"/>
-            <a:ext cx="68580" cy="676656"/>
+            <a:off x="566928" y="4681728"/>
+            <a:ext cx="64008" cy="713232"/>
           </a:xfrm>
           <a:prstGeom prst="rect">
             <a:avLst/>
           </a:prstGeom>
           <a:solidFill>
-            <a:srgbClr val="2EAD33"/>
+            <a:srgbClr val="43B7DC"/>
           </a:solidFill>
           <a:ln>
             <a:noFill/>
@@ -5137,8 +5175,8 @@
         </p:nvSpPr>
         <p:spPr>
           <a:xfrm>
-            <a:off x="822960" y="5006340"/>
-            <a:ext cx="10600639" cy="576072"/>
+            <a:off x="804672" y="4727448"/>
+            <a:ext cx="10637215" cy="621792"/>
           </a:xfrm>
           <a:prstGeom prst="rect">
             <a:avLst/>
@@ -5153,7 +5191,7 @@
           <a:p>
             <a:pPr algn="l">
               <a:lnSpc>
-                <a:spcPct val="115000"/>
+                <a:spcPct val="112000"/>
               </a:lnSpc>
               <a:spcBef>
                 <a:spcPts val="0"/>
@@ -5163,22 +5201,22 @@
               </a:spcAft>
             </a:pPr>
             <a:r>
-              <a:rPr sz="1350" b="1">
-                <a:solidFill>
-                  <a:srgbClr val="1E7A22"/>
+              <a:rPr sz="1500" b="1">
+                <a:solidFill>
+                  <a:srgbClr val="1C7896"/>
                 </a:solidFill>
                 <a:latin typeface="Segoe UI"/>
               </a:rPr>
               <a:t>Hands-on, next 60 minutes: </a:t>
             </a:r>
             <a:r>
-              <a:rPr sz="1350" b="0">
+              <a:rPr sz="1500" b="0">
                 <a:solidFill>
                   <a:srgbClr val="626B7A"/>
                 </a:solidFill>
                 <a:latin typeface="Segoe UI"/>
               </a:rPr>
-              <a:t>read a scenario → run stage 2 and watch the test appear → break a locator and watch the healer repair it → then watch it refuse to repair a bad one.</a:t>
+              <a:t>read a scenario → run stage 2 and watch the test appear → break a locator and watch it heal → watch it refuse a bad one.</a:t>
             </a:r>
           </a:p>
         </p:txBody>
@@ -5191,8 +5229,8 @@
         </p:nvSpPr>
         <p:spPr>
           <a:xfrm>
-            <a:off x="566928" y="5742432"/>
-            <a:ext cx="11057839" cy="621792"/>
+            <a:off x="566928" y="5504688"/>
+            <a:ext cx="11057839" cy="658368"/>
           </a:xfrm>
           <a:prstGeom prst="roundRect">
             <a:avLst>
@@ -5237,8 +5275,8 @@
         </p:nvSpPr>
         <p:spPr>
           <a:xfrm>
-            <a:off x="566928" y="5742432"/>
-            <a:ext cx="68580" cy="621792"/>
+            <a:off x="566928" y="5504688"/>
+            <a:ext cx="64008" cy="658368"/>
           </a:xfrm>
           <a:prstGeom prst="rect">
             <a:avLst/>
@@ -5281,8 +5319,8 @@
         </p:nvSpPr>
         <p:spPr>
           <a:xfrm>
-            <a:off x="822960" y="5792724"/>
-            <a:ext cx="10600639" cy="521208"/>
+            <a:off x="804672" y="5550407"/>
+            <a:ext cx="10637215" cy="566928"/>
           </a:xfrm>
           <a:prstGeom prst="rect">
             <a:avLst/>
@@ -5297,7 +5335,7 @@
           <a:p>
             <a:pPr algn="l">
               <a:lnSpc>
-                <a:spcPct val="115000"/>
+                <a:spcPct val="112000"/>
               </a:lnSpc>
               <a:spcBef>
                 <a:spcPts val="0"/>
@@ -5307,25 +5345,25 @@
               </a:spcAft>
             </a:pPr>
             <a:r>
-              <a:rPr sz="1350" b="1">
+              <a:rPr sz="1500" b="1">
                 <a:solidFill>
                   <a:srgbClr val="212630"/>
                 </a:solidFill>
                 <a:latin typeface="Segoe UI"/>
               </a:rPr>
-              <a:t>Questions, and the three files worth reading first: </a:t>
-            </a:r>
-            <a:r>
-              <a:rPr sz="1350" b="0">
-                <a:solidFill>
-                  <a:srgbClr val="1E7A22"/>
+              <a:t>The three files worth reading first: </a:t>
+            </a:r>
+            <a:r>
+              <a:rPr sz="1500" b="0">
+                <a:solidFill>
+                  <a:srgbClr val="1C7896"/>
                 </a:solidFill>
                 <a:latin typeface="Segoe UI"/>
               </a:rPr>
               <a:t>README.md</a:t>
             </a:r>
             <a:r>
-              <a:rPr sz="1350" b="0">
+              <a:rPr sz="1500" b="0">
                 <a:solidFill>
                   <a:srgbClr val="626B7A"/>
                 </a:solidFill>
@@ -5334,40 +5372,40 @@
               <a:t> (how to run it), </a:t>
             </a:r>
             <a:r>
-              <a:rPr sz="1350" b="0">
-                <a:solidFill>
-                  <a:srgbClr val="1E7A22"/>
+              <a:rPr sz="1500" b="0">
+                <a:solidFill>
+                  <a:srgbClr val="1C7896"/>
                 </a:solidFill>
                 <a:latin typeface="Segoe UI"/>
               </a:rPr>
               <a:t>WORKFLOW.md</a:t>
             </a:r>
             <a:r>
-              <a:rPr sz="1350" b="0">
+              <a:rPr sz="1500" b="0">
                 <a:solidFill>
                   <a:srgbClr val="626B7A"/>
                 </a:solidFill>
                 <a:latin typeface="Segoe UI"/>
               </a:rPr>
-              <a:t> (the workflow as diagrams) and </a:t>
-            </a:r>
-            <a:r>
-              <a:rPr sz="1350" b="0">
-                <a:solidFill>
-                  <a:srgbClr val="1E7A22"/>
+              <a:t> (the diagrams), </a:t>
+            </a:r>
+            <a:r>
+              <a:rPr sz="1500" b="0">
+                <a:solidFill>
+                  <a:srgbClr val="1C7896"/>
                 </a:solidFill>
                 <a:latin typeface="Segoe UI"/>
               </a:rPr>
               <a:t>pipeline-pattern.md</a:t>
             </a:r>
             <a:r>
-              <a:rPr sz="1350" b="0">
+              <a:rPr sz="1500" b="0">
                 <a:solidFill>
                   <a:srgbClr val="626B7A"/>
                 </a:solidFill>
                 <a:latin typeface="Segoe UI"/>
               </a:rPr>
-              <a:t> (why every gate is where it is).</a:t>
+              <a:t> (why each gate is where it is).</a:t>
             </a:r>
           </a:p>
         </p:txBody>
@@ -5380,8 +5418,8 @@
         </p:nvSpPr>
         <p:spPr>
           <a:xfrm>
-            <a:off x="566928" y="6382512"/>
-            <a:ext cx="11057839" cy="274320"/>
+            <a:off x="566928" y="6419088"/>
+            <a:ext cx="11057839" cy="256032"/>
           </a:xfrm>
           <a:prstGeom prst="rect">
             <a:avLst/>
@@ -5449,7 +5487,7 @@
         </p:nvSpPr>
         <p:spPr>
           <a:xfrm>
-            <a:off x="566928" y="384048"/>
+            <a:off x="566928" y="365760"/>
             <a:ext cx="11057839" cy="658368"/>
           </a:xfrm>
           <a:prstGeom prst="rect">
@@ -5472,7 +5510,7 @@
               </a:spcAft>
             </a:pPr>
             <a:r>
-              <a:rPr sz="2900" b="0">
+              <a:rPr sz="2700" b="0">
                 <a:solidFill>
                   <a:srgbClr val="171B23"/>
                 </a:solidFill>
@@ -5491,9 +5529,9 @@
               </a:spcAft>
             </a:pPr>
             <a:r>
-              <a:rPr sz="1250" b="0">
-                <a:solidFill>
-                  <a:srgbClr val="1E7A22"/>
+              <a:rPr sz="1150" b="0">
+                <a:solidFill>
+                  <a:srgbClr val="9AA2AE"/>
                 </a:solidFill>
                 <a:latin typeface="Segoe UI"/>
               </a:rPr>
@@ -5510,8 +5548,8 @@
         </p:nvSpPr>
         <p:spPr>
           <a:xfrm>
-            <a:off x="566928" y="1060704"/>
-            <a:ext cx="1051560" cy="50292"/>
+            <a:off x="566928" y="1042415"/>
+            <a:ext cx="777240" cy="41148"/>
           </a:xfrm>
           <a:prstGeom prst="roundRect">
             <a:avLst>
@@ -5519,7 +5557,7 @@
             </a:avLst>
           </a:prstGeom>
           <a:solidFill>
-            <a:srgbClr val="2EAD33"/>
+            <a:srgbClr val="43B7DC"/>
           </a:solidFill>
           <a:ln>
             <a:noFill/>
@@ -5556,8 +5594,8 @@
         </p:nvSpPr>
         <p:spPr>
           <a:xfrm>
-            <a:off x="566928" y="1783080"/>
-            <a:ext cx="11057839" cy="2926080"/>
+            <a:off x="566928" y="1645920"/>
+            <a:ext cx="11057839" cy="3291840"/>
           </a:xfrm>
           <a:prstGeom prst="rect">
             <a:avLst/>
@@ -5570,155 +5608,155 @@
           </a:bodyPr>
           <a:lstStyle/>
           <a:p>
-            <a:pPr marL="274320" indent="-274320">
+            <a:pPr marL="310896" indent="-310896">
               <a:spcBef>
                 <a:spcPts val="0"/>
               </a:spcBef>
               <a:spcAft>
-                <a:spcPts val="800"/>
+                <a:spcPts val="2600"/>
               </a:spcAft>
               <a:buNone/>
             </a:pPr>
             <a:r>
-              <a:rPr sz="1600" b="1">
-                <a:solidFill>
-                  <a:srgbClr val="2EAD33"/>
+              <a:rPr sz="2300" b="1">
+                <a:solidFill>
+                  <a:srgbClr val="1C7896"/>
                 </a:solidFill>
                 <a:latin typeface="Segoe UI"/>
               </a:rPr>
               <a:t>▪   </a:t>
             </a:r>
             <a:r>
-              <a:rPr sz="1600" b="1">
+              <a:rPr sz="2300" b="1">
+                <a:solidFill>
+                  <a:srgbClr val="1C7896"/>
+                </a:solidFill>
+                <a:latin typeface="Segoe UI"/>
+              </a:rPr>
+              <a:t>Tests drift.</a:t>
+            </a:r>
+            <a:r>
+              <a:rPr sz="2300">
                 <a:solidFill>
                   <a:srgbClr val="212630"/>
                 </a:solidFill>
                 <a:latin typeface="Segoe UI"/>
               </a:rPr>
-              <a:t>Tests drift. </a:t>
-            </a:r>
-            <a:r>
-              <a:rPr sz="1600">
+              <a:t> The app moves, the locator doesn't.</a:t>
+            </a:r>
+          </a:p>
+          <a:p>
+            <a:pPr marL="310896" indent="-310896">
+              <a:spcBef>
+                <a:spcPts val="0"/>
+              </a:spcBef>
+              <a:spcAft>
+                <a:spcPts val="2600"/>
+              </a:spcAft>
+              <a:buNone/>
+            </a:pPr>
+            <a:r>
+              <a:rPr sz="2300" b="1">
+                <a:solidFill>
+                  <a:srgbClr val="1C7896"/>
+                </a:solidFill>
+                <a:latin typeface="Segoe UI"/>
+              </a:rPr>
+              <a:t>▪   </a:t>
+            </a:r>
+            <a:r>
+              <a:rPr sz="2300" b="1">
+                <a:solidFill>
+                  <a:srgbClr val="1C7896"/>
+                </a:solidFill>
+                <a:latin typeface="Segoe UI"/>
+              </a:rPr>
+              <a:t>Coverage is invisible.</a:t>
+            </a:r>
+            <a:r>
+              <a:rPr sz="2300">
                 <a:solidFill>
                   <a:srgbClr val="212630"/>
                 </a:solidFill>
                 <a:latin typeface="Segoe UI"/>
               </a:rPr>
-              <a:t>The app moves, the locator does not. Maintenance eats the sprint, and it is the least interesting work on the board.</a:t>
-            </a:r>
-          </a:p>
-          <a:p>
-            <a:pPr marL="274320" indent="-274320">
+              <a:t> Which of these 40 tests still asserts anything?</a:t>
+            </a:r>
+          </a:p>
+          <a:p>
+            <a:pPr marL="310896" indent="-310896">
               <a:spcBef>
                 <a:spcPts val="0"/>
               </a:spcBef>
               <a:spcAft>
-                <a:spcPts val="800"/>
+                <a:spcPts val="2600"/>
               </a:spcAft>
               <a:buNone/>
             </a:pPr>
             <a:r>
-              <a:rPr sz="1600" b="1">
-                <a:solidFill>
-                  <a:srgbClr val="2EAD33"/>
+              <a:rPr sz="2300" b="1">
+                <a:solidFill>
+                  <a:srgbClr val="1C7896"/>
                 </a:solidFill>
                 <a:latin typeface="Segoe UI"/>
               </a:rPr>
               <a:t>▪   </a:t>
             </a:r>
             <a:r>
-              <a:rPr sz="1600" b="1">
+              <a:rPr sz="2300" b="1">
+                <a:solidFill>
+                  <a:srgbClr val="1C7896"/>
+                </a:solidFill>
+                <a:latin typeface="Segoe UI"/>
+              </a:rPr>
+              <a:t>Good tests are slow.</a:t>
+            </a:r>
+            <a:r>
+              <a:rPr sz="2300">
                 <a:solidFill>
                   <a:srgbClr val="212630"/>
                 </a:solidFill>
                 <a:latin typeface="Segoe UI"/>
               </a:rPr>
-              <a:t>Coverage is invisible. </a:t>
-            </a:r>
-            <a:r>
-              <a:rPr sz="1600">
+              <a:t> The judgement doesn't scale with headcount.</a:t>
+            </a:r>
+          </a:p>
+          <a:p>
+            <a:pPr marL="310896" indent="-310896">
+              <a:spcBef>
+                <a:spcPts val="0"/>
+              </a:spcBef>
+              <a:spcAft>
+                <a:spcPts val="400"/>
+              </a:spcAft>
+              <a:buNone/>
+            </a:pPr>
+            <a:r>
+              <a:rPr sz="2300" b="1">
+                <a:solidFill>
+                  <a:srgbClr val="1C7896"/>
+                </a:solidFill>
+                <a:latin typeface="Segoe UI"/>
+              </a:rPr>
+              <a:t>▪   </a:t>
+            </a:r>
+            <a:r>
+              <a:rPr sz="2300" b="1">
+                <a:solidFill>
+                  <a:srgbClr val="1C7896"/>
+                </a:solidFill>
+                <a:latin typeface="Segoe UI"/>
+              </a:rPr>
+              <a:t>AI writes tests already.</a:t>
+            </a:r>
+            <a:r>
+              <a:rPr sz="2300">
                 <a:solidFill>
                   <a:srgbClr val="212630"/>
                 </a:solidFill>
                 <a:latin typeface="Segoe UI"/>
               </a:rPr>
-              <a:t>Which of these 40 tests still tests something? Which one has quietly stopped asserting anything at all?</a:t>
-            </a:r>
-          </a:p>
-          <a:p>
-            <a:pPr marL="274320" indent="-274320">
-              <a:spcBef>
-                <a:spcPts val="0"/>
-              </a:spcBef>
-              <a:spcAft>
-                <a:spcPts val="800"/>
-              </a:spcAft>
-              <a:buNone/>
-            </a:pPr>
-            <a:r>
-              <a:rPr sz="1600" b="1">
-                <a:solidFill>
-                  <a:srgbClr val="2EAD33"/>
-                </a:solidFill>
-                <a:latin typeface="Segoe UI"/>
-              </a:rPr>
-              <a:t>▪   </a:t>
-            </a:r>
-            <a:r>
-              <a:rPr sz="1600" b="1">
-                <a:solidFill>
-                  <a:srgbClr val="212630"/>
-                </a:solidFill>
-                <a:latin typeface="Segoe UI"/>
-              </a:rPr>
-              <a:t>Writing a test is slow; writing a good one is slower. </a:t>
-            </a:r>
-            <a:r>
-              <a:rPr sz="1600">
-                <a:solidFill>
-                  <a:srgbClr val="212630"/>
-                </a:solidFill>
-                <a:latin typeface="Segoe UI"/>
-              </a:rPr>
-              <a:t>The judgement that makes a test worth having does not scale with headcount.</a:t>
-            </a:r>
-          </a:p>
-          <a:p>
-            <a:pPr marL="274320" indent="-274320">
-              <a:spcBef>
-                <a:spcPts val="0"/>
-              </a:spcBef>
-              <a:spcAft>
-                <a:spcPts val="800"/>
-              </a:spcAft>
-              <a:buNone/>
-            </a:pPr>
-            <a:r>
-              <a:rPr sz="1600" b="1">
-                <a:solidFill>
-                  <a:srgbClr val="2EAD33"/>
-                </a:solidFill>
-                <a:latin typeface="Segoe UI"/>
-              </a:rPr>
-              <a:t>▪   </a:t>
-            </a:r>
-            <a:r>
-              <a:rPr sz="1600" b="1">
-                <a:solidFill>
-                  <a:srgbClr val="212630"/>
-                </a:solidFill>
-                <a:latin typeface="Segoe UI"/>
-              </a:rPr>
-              <a:t>AI can write tests today. </a:t>
-            </a:r>
-            <a:r>
-              <a:rPr sz="1600">
-                <a:solidFill>
-                  <a:srgbClr val="212630"/>
-                </a:solidFill>
-                <a:latin typeface="Segoe UI"/>
-              </a:rPr>
-              <a:t>That was never the hard part — trusting the result is.</a:t>
+              <a:t> Trusting them is the hard part.</a:t>
             </a:r>
           </a:p>
         </p:txBody>
@@ -5732,7 +5770,7 @@
         <p:spPr>
           <a:xfrm>
             <a:off x="566928" y="4983480"/>
-            <a:ext cx="11057839" cy="566928"/>
+            <a:ext cx="11057839" cy="731520"/>
           </a:xfrm>
           <a:prstGeom prst="roundRect">
             <a:avLst>
@@ -5778,13 +5816,13 @@
         <p:spPr>
           <a:xfrm>
             <a:off x="566928" y="4983480"/>
-            <a:ext cx="68580" cy="566928"/>
+            <a:ext cx="64008" cy="731520"/>
           </a:xfrm>
           <a:prstGeom prst="rect">
             <a:avLst/>
           </a:prstGeom>
           <a:solidFill>
-            <a:srgbClr val="2EAD33"/>
+            <a:srgbClr val="43B7DC"/>
           </a:solidFill>
           <a:ln>
             <a:noFill/>
@@ -5821,8 +5859,8 @@
         </p:nvSpPr>
         <p:spPr>
           <a:xfrm>
-            <a:off x="822960" y="5033772"/>
-            <a:ext cx="10600639" cy="466344"/>
+            <a:off x="804672" y="5029200"/>
+            <a:ext cx="10637215" cy="640080"/>
           </a:xfrm>
           <a:prstGeom prst="rect">
             <a:avLst/>
@@ -5837,7 +5875,7 @@
           <a:p>
             <a:pPr algn="l">
               <a:lnSpc>
-                <a:spcPct val="115000"/>
+                <a:spcPct val="112000"/>
               </a:lnSpc>
               <a:spcBef>
                 <a:spcPts val="0"/>
@@ -5847,16 +5885,16 @@
               </a:spcAft>
             </a:pPr>
             <a:r>
-              <a:rPr sz="1350" b="1">
-                <a:solidFill>
-                  <a:srgbClr val="1E7A22"/>
+              <a:rPr sz="1800" b="1">
+                <a:solidFill>
+                  <a:srgbClr val="1C7896"/>
                 </a:solidFill>
                 <a:latin typeface="Segoe UI"/>
               </a:rPr>
               <a:t>AI proposes. </a:t>
             </a:r>
             <a:r>
-              <a:rPr sz="1350" b="1">
+              <a:rPr sz="1800" b="1">
                 <a:solidFill>
                   <a:srgbClr val="212630"/>
                 </a:solidFill>
@@ -5865,13 +5903,13 @@
               <a:t>Code enforces. </a:t>
             </a:r>
             <a:r>
-              <a:rPr sz="1350" b="0">
+              <a:rPr sz="1800" b="0">
                 <a:solidFill>
                   <a:srgbClr val="626B7A"/>
                 </a:solidFill>
                 <a:latin typeface="Segoe UI"/>
               </a:rPr>
-              <a:t>That single sentence is the design of everything that follows.</a:t>
+              <a:t>Everything after this slide is machinery for that.</a:t>
             </a:r>
           </a:p>
         </p:txBody>
@@ -5884,8 +5922,8 @@
         </p:nvSpPr>
         <p:spPr>
           <a:xfrm>
-            <a:off x="566928" y="6382512"/>
-            <a:ext cx="11057839" cy="274320"/>
+            <a:off x="566928" y="6419088"/>
+            <a:ext cx="11057839" cy="256032"/>
           </a:xfrm>
           <a:prstGeom prst="rect">
             <a:avLst/>
@@ -5953,7 +5991,7 @@
         </p:nvSpPr>
         <p:spPr>
           <a:xfrm>
-            <a:off x="566928" y="384048"/>
+            <a:off x="566928" y="365760"/>
             <a:ext cx="11057839" cy="658368"/>
           </a:xfrm>
           <a:prstGeom prst="rect">
@@ -5976,13 +6014,13 @@
               </a:spcAft>
             </a:pPr>
             <a:r>
-              <a:rPr sz="2900" b="0">
+              <a:rPr sz="2700" b="0">
                 <a:solidFill>
                   <a:srgbClr val="171B23"/>
                 </a:solidFill>
                 <a:latin typeface="Segoe UI"/>
               </a:rPr>
-              <a:t>Eight stages: an issue in, a reviewed PR out</a:t>
+              <a:t>Nine stages: a deployment in, a reviewed PR out</a:t>
             </a:r>
           </a:p>
           <a:p>
@@ -5995,9 +6033,9 @@
               </a:spcAft>
             </a:pPr>
             <a:r>
-              <a:rPr sz="1250" b="0">
-                <a:solidFill>
-                  <a:srgbClr val="1E7A22"/>
+              <a:rPr sz="1150" b="0">
+                <a:solidFill>
+                  <a:srgbClr val="9AA2AE"/>
                 </a:solidFill>
                 <a:latin typeface="Segoe UI"/>
               </a:rPr>
@@ -6014,8 +6052,8 @@
         </p:nvSpPr>
         <p:spPr>
           <a:xfrm>
-            <a:off x="566928" y="1060704"/>
-            <a:ext cx="1051560" cy="50292"/>
+            <a:off x="566928" y="1042415"/>
+            <a:ext cx="777240" cy="41148"/>
           </a:xfrm>
           <a:prstGeom prst="roundRect">
             <a:avLst>
@@ -6023,7 +6061,7 @@
             </a:avLst>
           </a:prstGeom>
           <a:solidFill>
-            <a:srgbClr val="2EAD33"/>
+            <a:srgbClr val="43B7DC"/>
           </a:solidFill>
           <a:ln>
             <a:noFill/>
@@ -6060,8 +6098,8 @@
         </p:nvSpPr>
         <p:spPr>
           <a:xfrm>
-            <a:off x="566928" y="1417320"/>
-            <a:ext cx="11057839" cy="274320"/>
+            <a:off x="566928" y="1280160"/>
+            <a:ext cx="11057839" cy="475488"/>
           </a:xfrm>
           <a:prstGeom prst="rect">
             <a:avLst/>
@@ -6098,7 +6136,7 @@
                 </a:solidFill>
                 <a:latin typeface="Segoe UI"/>
               </a:rPr>
-              <a:t>a GitHub issue + PR diff</a:t>
+              <a:t>a deployed change + its PR diff</a:t>
             </a:r>
             <a:r>
               <a:rPr sz="1350" b="0">
@@ -6107,7 +6145,7 @@
                 </a:solidFill>
                 <a:latin typeface="Segoe UI"/>
               </a:rPr>
-              <a:t>        →        </a:t>
+              <a:t>      →      </a:t>
             </a:r>
             <a:r>
               <a:rPr sz="1350" b="1">
@@ -6125,7 +6163,7 @@
                 </a:solidFill>
                 <a:latin typeface="Segoe UI"/>
               </a:rPr>
-              <a:t>tests, healed locators, a PR</a:t>
+              <a:t>tests, a PR, a report</a:t>
             </a:r>
             <a:r>
               <a:rPr sz="1350" b="0">
@@ -6134,7 +6172,7 @@
                 </a:solidFill>
                 <a:latin typeface="Segoe UI"/>
               </a:rPr>
-              <a:t>   — a human reviews it</a:t>
+              <a:t>   — a human reviews the PR</a:t>
             </a:r>
           </a:p>
         </p:txBody>
@@ -6147,8 +6185,8 @@
         </p:nvSpPr>
         <p:spPr>
           <a:xfrm>
-            <a:off x="566928" y="1920240"/>
-            <a:ext cx="2487168" cy="2148840"/>
+            <a:off x="566928" y="1783080"/>
+            <a:ext cx="2487168" cy="2240280"/>
           </a:xfrm>
           <a:prstGeom prst="roundRect">
             <a:avLst>
@@ -6195,14 +6233,14 @@
         </p:nvSpPr>
         <p:spPr>
           <a:xfrm>
-            <a:off x="566928" y="1920240"/>
+            <a:off x="566928" y="1783080"/>
             <a:ext cx="2487168" cy="68580"/>
           </a:xfrm>
           <a:prstGeom prst="rect">
             <a:avLst/>
           </a:prstGeom>
           <a:solidFill>
-            <a:srgbClr val="2EAD33"/>
+            <a:srgbClr val="43B7DC"/>
           </a:solidFill>
           <a:ln>
             <a:noFill/>
@@ -6239,8 +6277,8 @@
         </p:nvSpPr>
         <p:spPr>
           <a:xfrm>
-            <a:off x="786384" y="2194560"/>
-            <a:ext cx="2048256" cy="1691640"/>
+            <a:off x="768096" y="2039112"/>
+            <a:ext cx="2084832" cy="1819656"/>
           </a:xfrm>
           <a:prstGeom prst="rect">
             <a:avLst/>
@@ -6264,7 +6302,7 @@
             <a:r>
               <a:rPr sz="1000" b="0">
                 <a:solidFill>
-                  <a:srgbClr val="2EAD33"/>
+                  <a:srgbClr val="1C7896"/>
                 </a:solidFill>
                 <a:latin typeface="Segoe UI"/>
               </a:rPr>
@@ -6277,7 +6315,7 @@
                 <a:spcPts val="0"/>
               </a:spcBef>
               <a:spcAft>
-                <a:spcPts val="900"/>
+                <a:spcPts val="1000"/>
               </a:spcAft>
             </a:pPr>
             <a:r>
@@ -6296,11 +6334,11 @@
                 <a:spcPts val="0"/>
               </a:spcBef>
               <a:spcAft>
-                <a:spcPts val="250"/>
-              </a:spcAft>
-            </a:pPr>
-            <a:r>
-              <a:rPr sz="1150" b="0">
+                <a:spcPts val="300"/>
+              </a:spcAft>
+            </a:pPr>
+            <a:r>
+              <a:rPr sz="1200" b="0">
                 <a:solidFill>
                   <a:srgbClr val="212630"/>
                 </a:solidFill>
@@ -6315,11 +6353,11 @@
                 <a:spcPts val="0"/>
               </a:spcBef>
               <a:spcAft>
-                <a:spcPts val="250"/>
-              </a:spcAft>
-            </a:pPr>
-            <a:r>
-              <a:rPr sz="1150" b="0">
+                <a:spcPts val="300"/>
+              </a:spcAft>
+            </a:pPr>
+            <a:r>
+              <a:rPr sz="1200" b="0">
                 <a:solidFill>
                   <a:srgbClr val="212630"/>
                 </a:solidFill>
@@ -6334,7 +6372,7 @@
                 <a:spcPct val="110000"/>
               </a:lnSpc>
               <a:spcBef>
-                <a:spcPts val="700"/>
+                <a:spcPts val="800"/>
               </a:spcBef>
               <a:spcAft>
                 <a:spcPts val="0"/>
@@ -6347,7 +6385,7 @@
                 </a:solidFill>
                 <a:latin typeface="Segoe UI"/>
               </a:rPr>
-              <a:t>read the diff → risk areas → scenarios</a:t>
+              <a:t>diff → risk areas → scenarios</a:t>
             </a:r>
           </a:p>
         </p:txBody>
@@ -6360,14 +6398,14 @@
         </p:nvSpPr>
         <p:spPr>
           <a:xfrm>
-            <a:off x="3095244" y="2875788"/>
+            <a:off x="3095244" y="2784348"/>
             <a:ext cx="237744" cy="237744"/>
           </a:xfrm>
           <a:prstGeom prst="rightArrow">
             <a:avLst/>
           </a:prstGeom>
           <a:solidFill>
-            <a:srgbClr val="2EAD33"/>
+            <a:srgbClr val="43B7DC"/>
           </a:solidFill>
           <a:ln>
             <a:noFill/>
@@ -6404,8 +6442,8 @@
         </p:nvSpPr>
         <p:spPr>
           <a:xfrm>
-            <a:off x="3374136" y="1920240"/>
-            <a:ext cx="2487168" cy="2148840"/>
+            <a:off x="3374136" y="1783080"/>
+            <a:ext cx="2487168" cy="2240280"/>
           </a:xfrm>
           <a:prstGeom prst="roundRect">
             <a:avLst>
@@ -6452,14 +6490,14 @@
         </p:nvSpPr>
         <p:spPr>
           <a:xfrm>
-            <a:off x="3374136" y="1920240"/>
+            <a:off x="3374136" y="1783080"/>
             <a:ext cx="2487168" cy="68580"/>
           </a:xfrm>
           <a:prstGeom prst="rect">
             <a:avLst/>
           </a:prstGeom>
           <a:solidFill>
-            <a:srgbClr val="2C7FB8"/>
+            <a:srgbClr val="3A539E"/>
           </a:solidFill>
           <a:ln>
             <a:noFill/>
@@ -6496,8 +6534,8 @@
         </p:nvSpPr>
         <p:spPr>
           <a:xfrm>
-            <a:off x="3593592" y="2194560"/>
-            <a:ext cx="2048256" cy="1691640"/>
+            <a:off x="3575304" y="2039112"/>
+            <a:ext cx="2084832" cy="1819656"/>
           </a:xfrm>
           <a:prstGeom prst="rect">
             <a:avLst/>
@@ -6521,7 +6559,7 @@
             <a:r>
               <a:rPr sz="1000" b="0">
                 <a:solidFill>
-                  <a:srgbClr val="2C7FB8"/>
+                  <a:srgbClr val="3A539E"/>
                 </a:solidFill>
                 <a:latin typeface="Segoe UI"/>
               </a:rPr>
@@ -6534,7 +6572,7 @@
                 <a:spcPts val="0"/>
               </a:spcBef>
               <a:spcAft>
-                <a:spcPts val="900"/>
+                <a:spcPts val="1000"/>
               </a:spcAft>
             </a:pPr>
             <a:r>
@@ -6553,11 +6591,11 @@
                 <a:spcPts val="0"/>
               </a:spcBef>
               <a:spcAft>
-                <a:spcPts val="250"/>
-              </a:spcAft>
-            </a:pPr>
-            <a:r>
-              <a:rPr sz="1150" b="0">
+                <a:spcPts val="300"/>
+              </a:spcAft>
+            </a:pPr>
+            <a:r>
+              <a:rPr sz="1200" b="0">
                 <a:solidFill>
                   <a:srgbClr val="212630"/>
                 </a:solidFill>
@@ -6572,11 +6610,11 @@
                 <a:spcPts val="0"/>
               </a:spcBef>
               <a:spcAft>
-                <a:spcPts val="250"/>
-              </a:spcAft>
-            </a:pPr>
-            <a:r>
-              <a:rPr sz="1150" b="0">
+                <a:spcPts val="300"/>
+              </a:spcAft>
+            </a:pPr>
+            <a:r>
+              <a:rPr sz="1200" b="0">
                 <a:solidFill>
                   <a:srgbClr val="212630"/>
                 </a:solidFill>
@@ -6591,7 +6629,7 @@
                 <a:spcPct val="110000"/>
               </a:lnSpc>
               <a:spcBef>
-                <a:spcPts val="700"/>
+                <a:spcPts val="800"/>
               </a:spcBef>
               <a:spcAft>
                 <a:spcPts val="0"/>
@@ -6617,14 +6655,14 @@
         </p:nvSpPr>
         <p:spPr>
           <a:xfrm>
-            <a:off x="5902452" y="2875788"/>
+            <a:off x="5902452" y="2784348"/>
             <a:ext cx="237744" cy="237744"/>
           </a:xfrm>
           <a:prstGeom prst="rightArrow">
             <a:avLst/>
           </a:prstGeom>
           <a:solidFill>
-            <a:srgbClr val="2EAD33"/>
+            <a:srgbClr val="43B7DC"/>
           </a:solidFill>
           <a:ln>
             <a:noFill/>
@@ -6661,8 +6699,8 @@
         </p:nvSpPr>
         <p:spPr>
           <a:xfrm>
-            <a:off x="6181344" y="1920240"/>
-            <a:ext cx="2487168" cy="2148840"/>
+            <a:off x="6181344" y="1783080"/>
+            <a:ext cx="2487168" cy="2240280"/>
           </a:xfrm>
           <a:prstGeom prst="roundRect">
             <a:avLst>
@@ -6709,7 +6747,7 @@
         </p:nvSpPr>
         <p:spPr>
           <a:xfrm>
-            <a:off x="6181344" y="1920240"/>
+            <a:off x="6181344" y="1783080"/>
             <a:ext cx="2487168" cy="68580"/>
           </a:xfrm>
           <a:prstGeom prst="rect">
@@ -6753,8 +6791,8 @@
         </p:nvSpPr>
         <p:spPr>
           <a:xfrm>
-            <a:off x="6400800" y="2194560"/>
-            <a:ext cx="2048256" cy="1691640"/>
+            <a:off x="6382512" y="2039112"/>
+            <a:ext cx="2084832" cy="1819656"/>
           </a:xfrm>
           <a:prstGeom prst="rect">
             <a:avLst/>
@@ -6791,7 +6829,7 @@
                 <a:spcPts val="0"/>
               </a:spcBef>
               <a:spcAft>
-                <a:spcPts val="900"/>
+                <a:spcPts val="1000"/>
               </a:spcAft>
             </a:pPr>
             <a:r>
@@ -6810,11 +6848,11 @@
                 <a:spcPts val="0"/>
               </a:spcBef>
               <a:spcAft>
-                <a:spcPts val="250"/>
-              </a:spcAft>
-            </a:pPr>
-            <a:r>
-              <a:rPr sz="1150" b="0">
+                <a:spcPts val="300"/>
+              </a:spcAft>
+            </a:pPr>
+            <a:r>
+              <a:rPr sz="1200" b="0">
                 <a:solidFill>
                   <a:srgbClr val="212630"/>
                 </a:solidFill>
@@ -6829,11 +6867,11 @@
                 <a:spcPts val="0"/>
               </a:spcBef>
               <a:spcAft>
-                <a:spcPts val="250"/>
-              </a:spcAft>
-            </a:pPr>
-            <a:r>
-              <a:rPr sz="1150" b="0">
+                <a:spcPts val="300"/>
+              </a:spcAft>
+            </a:pPr>
+            <a:r>
+              <a:rPr sz="1200" b="0">
                 <a:solidFill>
                   <a:srgbClr val="212630"/>
                 </a:solidFill>
@@ -6848,7 +6886,7 @@
                 <a:spcPct val="110000"/>
               </a:lnSpc>
               <a:spcBef>
-                <a:spcPts val="700"/>
+                <a:spcPts val="800"/>
               </a:spcBef>
               <a:spcAft>
                 <a:spcPts val="0"/>
@@ -6861,7 +6899,7 @@
                 </a:solidFill>
                 <a:latin typeface="Segoe UI"/>
               </a:rPr>
-              <a:t>pick a tier by tag, then execute</a:t>
+              <a:t>an agent picks a scope, then run by tag</a:t>
             </a:r>
           </a:p>
         </p:txBody>
@@ -6874,14 +6912,14 @@
         </p:nvSpPr>
         <p:spPr>
           <a:xfrm>
-            <a:off x="8709660" y="2875788"/>
+            <a:off x="8709660" y="2784348"/>
             <a:ext cx="237744" cy="237744"/>
           </a:xfrm>
           <a:prstGeom prst="rightArrow">
             <a:avLst/>
           </a:prstGeom>
           <a:solidFill>
-            <a:srgbClr val="2EAD33"/>
+            <a:srgbClr val="43B7DC"/>
           </a:solidFill>
           <a:ln>
             <a:noFill/>
@@ -6918,8 +6956,8 @@
         </p:nvSpPr>
         <p:spPr>
           <a:xfrm>
-            <a:off x="8988552" y="1920240"/>
-            <a:ext cx="2487168" cy="2148840"/>
+            <a:off x="8988552" y="1783080"/>
+            <a:ext cx="2487168" cy="2240280"/>
           </a:xfrm>
           <a:prstGeom prst="roundRect">
             <a:avLst>
@@ -6966,14 +7004,14 @@
         </p:nvSpPr>
         <p:spPr>
           <a:xfrm>
-            <a:off x="8988552" y="1920240"/>
+            <a:off x="8988552" y="1783080"/>
             <a:ext cx="2487168" cy="68580"/>
           </a:xfrm>
           <a:prstGeom prst="rect">
             <a:avLst/>
           </a:prstGeom>
           <a:solidFill>
-            <a:srgbClr val="C0691E"/>
+            <a:srgbClr val="A45716"/>
           </a:solidFill>
           <a:ln>
             <a:noFill/>
@@ -7010,8 +7048,8 @@
         </p:nvSpPr>
         <p:spPr>
           <a:xfrm>
-            <a:off x="9208008" y="2194560"/>
-            <a:ext cx="2048256" cy="1691640"/>
+            <a:off x="9189720" y="2039112"/>
+            <a:ext cx="2084832" cy="1819656"/>
           </a:xfrm>
           <a:prstGeom prst="rect">
             <a:avLst/>
@@ -7035,7 +7073,7 @@
             <a:r>
               <a:rPr sz="1000" b="0">
                 <a:solidFill>
-                  <a:srgbClr val="C0691E"/>
+                  <a:srgbClr val="A45716"/>
                 </a:solidFill>
                 <a:latin typeface="Segoe UI"/>
               </a:rPr>
@@ -7048,7 +7086,7 @@
                 <a:spcPts val="0"/>
               </a:spcBef>
               <a:spcAft>
-                <a:spcPts val="900"/>
+                <a:spcPts val="1000"/>
               </a:spcAft>
             </a:pPr>
             <a:r>
@@ -7058,7 +7096,7 @@
                 </a:solidFill>
                 <a:latin typeface="Segoe UI"/>
               </a:rPr>
-              <a:t>Repair &amp; ship</a:t>
+              <a:t>Repair, ship, report</a:t>
             </a:r>
           </a:p>
           <a:p>
@@ -7067,11 +7105,11 @@
                 <a:spcPts val="0"/>
               </a:spcBef>
               <a:spcAft>
-                <a:spcPts val="250"/>
-              </a:spcAft>
-            </a:pPr>
-            <a:r>
-              <a:rPr sz="1150" b="0">
+                <a:spcPts val="300"/>
+              </a:spcAft>
+            </a:pPr>
+            <a:r>
+              <a:rPr sz="1200" b="0">
                 <a:solidFill>
                   <a:srgbClr val="212630"/>
                 </a:solidFill>
@@ -7086,17 +7124,36 @@
                 <a:spcPts val="0"/>
               </a:spcBef>
               <a:spcAft>
-                <a:spcPts val="250"/>
-              </a:spcAft>
-            </a:pPr>
-            <a:r>
-              <a:rPr sz="1150" b="0">
+                <a:spcPts val="300"/>
+              </a:spcAft>
+            </a:pPr>
+            <a:r>
+              <a:rPr sz="1200" b="0">
                 <a:solidFill>
                   <a:srgbClr val="212630"/>
                 </a:solidFill>
                 <a:latin typeface="Segoe UI"/>
               </a:rPr>
               <a:t>8  git</a:t>
+            </a:r>
+          </a:p>
+          <a:p>
+            <a:pPr algn="l">
+              <a:spcBef>
+                <a:spcPts val="0"/>
+              </a:spcBef>
+              <a:spcAft>
+                <a:spcPts val="300"/>
+              </a:spcAft>
+            </a:pPr>
+            <a:r>
+              <a:rPr sz="1200" b="0">
+                <a:solidFill>
+                  <a:srgbClr val="212630"/>
+                </a:solidFill>
+                <a:latin typeface="Segoe UI"/>
+              </a:rPr>
+              <a:t>9  notify</a:t>
             </a:r>
           </a:p>
           <a:p>
@@ -7105,7 +7162,7 @@
                 <a:spcPct val="110000"/>
               </a:lnSpc>
               <a:spcBef>
-                <a:spcPts val="700"/>
+                <a:spcPts val="800"/>
               </a:spcBef>
               <a:spcAft>
                 <a:spcPts val="0"/>
@@ -7118,7 +7175,7 @@
                 </a:solidFill>
                 <a:latin typeface="Segoe UI"/>
               </a:rPr>
-              <a:t>fold in verified locator repairs, open a PR</a:t>
+              <a:t>fold in verified repairs, open a PR, tell the chat</a:t>
             </a:r>
           </a:p>
         </p:txBody>
@@ -7131,8 +7188,8 @@
         </p:nvSpPr>
         <p:spPr>
           <a:xfrm>
-            <a:off x="566928" y="4343400"/>
-            <a:ext cx="11057839" cy="658368"/>
+            <a:off x="566928" y="4224528"/>
+            <a:ext cx="11057839" cy="621792"/>
           </a:xfrm>
           <a:prstGeom prst="roundRect">
             <a:avLst>
@@ -7177,14 +7234,14 @@
         </p:nvSpPr>
         <p:spPr>
           <a:xfrm>
-            <a:off x="566928" y="4343400"/>
-            <a:ext cx="68580" cy="658368"/>
+            <a:off x="566928" y="4224528"/>
+            <a:ext cx="64008" cy="621792"/>
           </a:xfrm>
           <a:prstGeom prst="rect">
             <a:avLst/>
           </a:prstGeom>
           <a:solidFill>
-            <a:srgbClr val="2EAD33"/>
+            <a:srgbClr val="43B7DC"/>
           </a:solidFill>
           <a:ln>
             <a:noFill/>
@@ -7221,8 +7278,8 @@
         </p:nvSpPr>
         <p:spPr>
           <a:xfrm>
-            <a:off x="822960" y="4393692"/>
-            <a:ext cx="10600639" cy="557784"/>
+            <a:off x="804672" y="4270248"/>
+            <a:ext cx="10637215" cy="530352"/>
           </a:xfrm>
           <a:prstGeom prst="rect">
             <a:avLst/>
@@ -7237,7 +7294,7 @@
           <a:p>
             <a:pPr algn="l">
               <a:lnSpc>
-                <a:spcPct val="115000"/>
+                <a:spcPct val="112000"/>
               </a:lnSpc>
               <a:spcBef>
                 <a:spcPts val="0"/>
@@ -7247,31 +7304,22 @@
               </a:spcAft>
             </a:pPr>
             <a:r>
-              <a:rPr sz="1350" b="1">
+              <a:rPr sz="1500" b="1">
                 <a:solidFill>
                   <a:srgbClr val="212630"/>
                 </a:solidFill>
                 <a:latin typeface="Segoe UI"/>
               </a:rPr>
-              <a:t>Re-runnable one at a time. </a:t>
-            </a:r>
-            <a:r>
-              <a:rPr sz="1350" b="0">
-                <a:solidFill>
-                  <a:srgbClr val="1E7A22"/>
-                </a:solidFill>
-                <a:latin typeface="Segoe UI"/>
-              </a:rPr>
-              <a:t>npm run stage:2</a:t>
-            </a:r>
-            <a:r>
-              <a:rPr sz="1350" b="0">
+              <a:t>Fatal vs recorded. </a:t>
+            </a:r>
+            <a:r>
+              <a:rPr sz="1500" b="0">
                 <a:solidFill>
                   <a:srgbClr val="626B7A"/>
                 </a:solidFill>
                 <a:latin typeface="Segoe UI"/>
               </a:rPr>
-              <a:t> re-runs a single stage against the manifest the last run left on disk — that is the debug handle, and how you learn the system.</a:t>
+              <a:t>1–2 decide what to cover, so they stop the run. 3–9 record the failure and carry on.</a:t>
             </a:r>
           </a:p>
         </p:txBody>
@@ -7284,8 +7332,8 @@
         </p:nvSpPr>
         <p:spPr>
           <a:xfrm>
-            <a:off x="566928" y="5138928"/>
-            <a:ext cx="11057839" cy="658368"/>
+            <a:off x="566928" y="4974336"/>
+            <a:ext cx="11057839" cy="621792"/>
           </a:xfrm>
           <a:prstGeom prst="roundRect">
             <a:avLst>
@@ -7330,8 +7378,8 @@
         </p:nvSpPr>
         <p:spPr>
           <a:xfrm>
-            <a:off x="566928" y="5138928"/>
-            <a:ext cx="68580" cy="658368"/>
+            <a:off x="566928" y="4974336"/>
+            <a:ext cx="64008" cy="621792"/>
           </a:xfrm>
           <a:prstGeom prst="rect">
             <a:avLst/>
@@ -7374,8 +7422,8 @@
         </p:nvSpPr>
         <p:spPr>
           <a:xfrm>
-            <a:off x="822960" y="5189220"/>
-            <a:ext cx="10600639" cy="557784"/>
+            <a:off x="804672" y="5020056"/>
+            <a:ext cx="10637215" cy="530352"/>
           </a:xfrm>
           <a:prstGeom prst="rect">
             <a:avLst/>
@@ -7390,7 +7438,7 @@
           <a:p>
             <a:pPr algn="l">
               <a:lnSpc>
-                <a:spcPct val="115000"/>
+                <a:spcPct val="112000"/>
               </a:lnSpc>
               <a:spcBef>
                 <a:spcPts val="0"/>
@@ -7400,36 +7448,189 @@
               </a:spcAft>
             </a:pPr>
             <a:r>
-              <a:rPr sz="1350" b="1">
+              <a:rPr sz="1500" b="1">
                 <a:solidFill>
                   <a:srgbClr val="212630"/>
                 </a:solidFill>
                 <a:latin typeface="Segoe UI"/>
               </a:rPr>
-              <a:t>Fatal vs recorded. </a:t>
-            </a:r>
-            <a:r>
-              <a:rPr sz="1350" b="0">
+              <a:t>A run that dies still reports. </a:t>
+            </a:r>
+            <a:r>
+              <a:rPr sz="1500" b="0">
                 <a:solidFill>
                   <a:srgbClr val="626B7A"/>
                 </a:solidFill>
                 <a:latin typeface="Segoe UI"/>
               </a:rPr>
-              <a:t>Stages 1–2 are fatal (they decide what to cover). 3–7 record their failure and the run continues, so you get the whole picture in one pass.</a:t>
-            </a:r>
-          </a:p>
-        </p:txBody>
-      </p:sp>
-      <p:sp>
-        <p:nvSpPr>
-          <p:cNvPr id="26" name="TextBox 25"/>
+              <a:t>The abort sends its own message: what did not happen, and the tail of the stage output.</a:t>
+            </a:r>
+          </a:p>
+        </p:txBody>
+      </p:sp>
+      <p:sp>
+        <p:nvSpPr>
+          <p:cNvPr id="26" name="Rounded Rectangle 25"/>
+          <p:cNvSpPr/>
+          <p:nvPr/>
+        </p:nvSpPr>
+        <p:spPr>
+          <a:xfrm>
+            <a:off x="566928" y="5724144"/>
+            <a:ext cx="11057839" cy="621792"/>
+          </a:xfrm>
+          <a:prstGeom prst="roundRect">
+            <a:avLst>
+              <a:gd name="adj" fmla="val 10000"/>
+            </a:avLst>
+          </a:prstGeom>
+          <a:solidFill>
+            <a:srgbClr val="F3F5F8"/>
+          </a:solidFill>
+          <a:ln>
+            <a:noFill/>
+          </a:ln>
+          <a:effectLst/>
+        </p:spPr>
+        <p:style>
+          <a:lnRef idx="1">
+            <a:schemeClr val="accent1"/>
+          </a:lnRef>
+          <a:fillRef idx="3">
+            <a:schemeClr val="accent1"/>
+          </a:fillRef>
+          <a:effectRef idx="2">
+            <a:schemeClr val="accent1"/>
+          </a:effectRef>
+          <a:fontRef idx="minor">
+            <a:schemeClr val="lt1"/>
+          </a:fontRef>
+        </p:style>
+        <p:txBody>
+          <a:bodyPr rtlCol="0" anchor="ctr" wrap="square"/>
+          <a:lstStyle/>
+          <a:p>
+            <a:pPr algn="ctr"/>
+          </a:p>
+        </p:txBody>
+      </p:sp>
+      <p:sp>
+        <p:nvSpPr>
+          <p:cNvPr id="27" name="Rectangle 26"/>
+          <p:cNvSpPr/>
+          <p:nvPr/>
+        </p:nvSpPr>
+        <p:spPr>
+          <a:xfrm>
+            <a:off x="566928" y="5724144"/>
+            <a:ext cx="64008" cy="621792"/>
+          </a:xfrm>
+          <a:prstGeom prst="rect">
+            <a:avLst/>
+          </a:prstGeom>
+          <a:solidFill>
+            <a:srgbClr val="43B7DC"/>
+          </a:solidFill>
+          <a:ln>
+            <a:noFill/>
+          </a:ln>
+          <a:effectLst/>
+        </p:spPr>
+        <p:style>
+          <a:lnRef idx="1">
+            <a:schemeClr val="accent1"/>
+          </a:lnRef>
+          <a:fillRef idx="3">
+            <a:schemeClr val="accent1"/>
+          </a:fillRef>
+          <a:effectRef idx="2">
+            <a:schemeClr val="accent1"/>
+          </a:effectRef>
+          <a:fontRef idx="minor">
+            <a:schemeClr val="lt1"/>
+          </a:fontRef>
+        </p:style>
+        <p:txBody>
+          <a:bodyPr rtlCol="0" anchor="ctr" wrap="square"/>
+          <a:lstStyle/>
+          <a:p>
+            <a:pPr algn="ctr"/>
+          </a:p>
+        </p:txBody>
+      </p:sp>
+      <p:sp>
+        <p:nvSpPr>
+          <p:cNvPr id="28" name="TextBox 27"/>
           <p:cNvSpPr txBox="1"/>
           <p:nvPr/>
         </p:nvSpPr>
         <p:spPr>
           <a:xfrm>
-            <a:off x="566928" y="6382512"/>
-            <a:ext cx="11057839" cy="274320"/>
+            <a:off x="804672" y="5769864"/>
+            <a:ext cx="10637215" cy="530352"/>
+          </a:xfrm>
+          <a:prstGeom prst="rect">
+            <a:avLst/>
+          </a:prstGeom>
+          <a:noFill/>
+        </p:spPr>
+        <p:txBody>
+          <a:bodyPr wrap="square" anchor="ctr" lIns="0" rIns="0" tIns="0" bIns="0">
+            <a:spAutoFit/>
+          </a:bodyPr>
+          <a:lstStyle/>
+          <a:p>
+            <a:pPr algn="l">
+              <a:lnSpc>
+                <a:spcPct val="112000"/>
+              </a:lnSpc>
+              <a:spcBef>
+                <a:spcPts val="0"/>
+              </a:spcBef>
+              <a:spcAft>
+                <a:spcPts val="0"/>
+              </a:spcAft>
+            </a:pPr>
+            <a:r>
+              <a:rPr sz="1500" b="1">
+                <a:solidFill>
+                  <a:srgbClr val="1C7896"/>
+                </a:solidFill>
+                <a:latin typeface="Segoe UI"/>
+              </a:rPr>
+              <a:t>One stage at a time. </a:t>
+            </a:r>
+            <a:r>
+              <a:rPr sz="1500" b="0">
+                <a:solidFill>
+                  <a:srgbClr val="212630"/>
+                </a:solidFill>
+                <a:latin typeface="Segoe UI"/>
+              </a:rPr>
+              <a:t>npm run stage:2</a:t>
+            </a:r>
+            <a:r>
+              <a:rPr sz="1500" b="0">
+                <a:solidFill>
+                  <a:srgbClr val="626B7A"/>
+                </a:solidFill>
+                <a:latin typeface="Segoe UI"/>
+              </a:rPr>
+              <a:t> re-runs a stage against the manifest the last run left on disk.</a:t>
+            </a:r>
+          </a:p>
+        </p:txBody>
+      </p:sp>
+      <p:sp>
+        <p:nvSpPr>
+          <p:cNvPr id="29" name="TextBox 28"/>
+          <p:cNvSpPr txBox="1"/>
+          <p:nvPr/>
+        </p:nvSpPr>
+        <p:spPr>
+          <a:xfrm>
+            <a:off x="566928" y="6419088"/>
+            <a:ext cx="11057839" cy="256032"/>
           </a:xfrm>
           <a:prstGeom prst="rect">
             <a:avLst/>
@@ -7497,7 +7698,7 @@
         </p:nvSpPr>
         <p:spPr>
           <a:xfrm>
-            <a:off x="566928" y="384048"/>
+            <a:off x="566928" y="365760"/>
             <a:ext cx="11057839" cy="658368"/>
           </a:xfrm>
           <a:prstGeom prst="rect">
@@ -7520,7 +7721,7 @@
               </a:spcAft>
             </a:pPr>
             <a:r>
-              <a:rPr sz="2900" b="0">
+              <a:rPr sz="2700" b="0">
                 <a:solidFill>
                   <a:srgbClr val="171B23"/>
                 </a:solidFill>
@@ -7539,9 +7740,9 @@
               </a:spcAft>
             </a:pPr>
             <a:r>
-              <a:rPr sz="1250" b="0">
-                <a:solidFill>
-                  <a:srgbClr val="1E7A22"/>
+              <a:rPr sz="1150" b="0">
+                <a:solidFill>
+                  <a:srgbClr val="9AA2AE"/>
                 </a:solidFill>
                 <a:latin typeface="Segoe UI"/>
               </a:rPr>
@@ -7558,8 +7759,8 @@
         </p:nvSpPr>
         <p:spPr>
           <a:xfrm>
-            <a:off x="566928" y="1060704"/>
-            <a:ext cx="1051560" cy="50292"/>
+            <a:off x="566928" y="1042415"/>
+            <a:ext cx="777240" cy="41148"/>
           </a:xfrm>
           <a:prstGeom prst="roundRect">
             <a:avLst>
@@ -7567,7 +7768,7 @@
             </a:avLst>
           </a:prstGeom>
           <a:solidFill>
-            <a:srgbClr val="2EAD33"/>
+            <a:srgbClr val="43B7DC"/>
           </a:solidFill>
           <a:ln>
             <a:noFill/>
@@ -7604,8 +7805,8 @@
         </p:nvSpPr>
         <p:spPr>
           <a:xfrm>
-            <a:off x="566928" y="1691640"/>
-            <a:ext cx="5029200" cy="3246120"/>
+            <a:off x="566928" y="1572768"/>
+            <a:ext cx="5120640" cy="3063240"/>
           </a:xfrm>
           <a:prstGeom prst="roundRect">
             <a:avLst>
@@ -7650,8 +7851,8 @@
         </p:nvSpPr>
         <p:spPr>
           <a:xfrm>
-            <a:off x="768096" y="1856232"/>
-            <a:ext cx="4626864" cy="2916936"/>
+            <a:off x="768096" y="1719072"/>
+            <a:ext cx="4718303" cy="2770632"/>
           </a:xfrm>
           <a:prstGeom prst="rect">
             <a:avLst/>
@@ -7672,17 +7873,17 @@
                 <a:spcPts val="0"/>
               </a:spcBef>
               <a:spcAft>
-                <a:spcPts val="350"/>
-              </a:spcAft>
-            </a:pPr>
-            <a:r>
-              <a:rPr sz="1150" b="0">
+                <a:spcPts val="400"/>
+              </a:spcAft>
+            </a:pPr>
+            <a:r>
+              <a:rPr sz="1250" b="0">
                 <a:solidFill>
                   <a:srgbClr val="8C98A8"/>
                 </a:solidFill>
                 <a:latin typeface="Segoe UI"/>
               </a:rPr>
-              <a:t># scenarios/landing-page.txt</a:t>
+              <a:t># scenarios/gallery.txt</a:t>
             </a:r>
           </a:p>
           <a:p>
@@ -7694,11 +7895,11 @@
                 <a:spcPts val="0"/>
               </a:spcBef>
               <a:spcAft>
-                <a:spcPts val="350"/>
-              </a:spcAft>
-            </a:pPr>
-            <a:r>
-              <a:rPr sz="1150" b="0">
+                <a:spcPts val="400"/>
+              </a:spcAft>
+            </a:pPr>
+            <a:r>
+              <a:rPr sz="1250" b="0">
                 <a:solidFill>
                   <a:srgbClr val="E7EAF0"/>
                 </a:solidFill>
@@ -7716,17 +7917,17 @@
                 <a:spcPts val="0"/>
               </a:spcBef>
               <a:spcAft>
-                <a:spcPts val="350"/>
-              </a:spcAft>
-            </a:pPr>
-            <a:r>
-              <a:rPr sz="1150" b="0">
+                <a:spcPts val="400"/>
+              </a:spcAft>
+            </a:pPr>
+            <a:r>
+              <a:rPr sz="1250" b="0">
                 <a:solidFill>
                   <a:srgbClr val="E7EAF0"/>
                 </a:solidFill>
                 <a:latin typeface="Segoe UI"/>
               </a:rPr>
-              <a:t>TEST: The pricing section lists all</a:t>
+              <a:t>TEST: A category filter narrows</a:t>
             </a:r>
           </a:p>
           <a:p>
@@ -7738,17 +7939,17 @@
                 <a:spcPts val="0"/>
               </a:spcBef>
               <a:spcAft>
-                <a:spcPts val="350"/>
-              </a:spcAft>
-            </a:pPr>
-            <a:r>
-              <a:rPr sz="1150" b="0">
+                <a:spcPts val="400"/>
+              </a:spcAft>
+            </a:pPr>
+            <a:r>
+              <a:rPr sz="1250" b="0">
                 <a:solidFill>
                   <a:srgbClr val="E7EAF0"/>
                 </a:solidFill>
                 <a:latin typeface="Segoe UI"/>
               </a:rPr>
-              <a:t>      six packages</a:t>
+              <a:t>      the gallery to its proofs</a:t>
             </a:r>
           </a:p>
           <a:p>
@@ -7760,17 +7961,17 @@
                 <a:spcPts val="0"/>
               </a:spcBef>
               <a:spcAft>
-                <a:spcPts val="350"/>
-              </a:spcAft>
-            </a:pPr>
-            <a:r>
-              <a:rPr sz="1150" b="0">
+                <a:spcPts val="400"/>
+              </a:spcAft>
+            </a:pPr>
+            <a:r>
+              <a:rPr sz="1250" b="0">
                 <a:solidFill>
                   <a:srgbClr val="E7EAF0"/>
                 </a:solidFill>
                 <a:latin typeface="Segoe UI"/>
               </a:rPr>
-              <a:t>Tags: @core @smoke</a:t>
+              <a:t>Tags: @smoke @core</a:t>
             </a:r>
           </a:p>
           <a:p>
@@ -7782,17 +7983,17 @@
                 <a:spcPts val="0"/>
               </a:spcBef>
               <a:spcAft>
-                <a:spcPts val="350"/>
-              </a:spcAft>
-            </a:pPr>
-            <a:r>
-              <a:rPr sz="1150" b="0">
+                <a:spcPts val="400"/>
+              </a:spcAft>
+            </a:pPr>
+            <a:r>
+              <a:rPr sz="1250" b="0">
                 <a:solidFill>
                   <a:srgbClr val="E7EAF0"/>
                 </a:solidFill>
                 <a:latin typeface="Segoe UI"/>
               </a:rPr>
-              <a:t>Expected: Six package cards, each</a:t>
+              <a:t>Expected: Clicking the macro pill</a:t>
             </a:r>
           </a:p>
           <a:p>
@@ -7804,17 +8005,17 @@
                 <a:spcPts val="0"/>
               </a:spcBef>
               <a:spcAft>
-                <a:spcPts val="350"/>
-              </a:spcAft>
-            </a:pPr>
-            <a:r>
-              <a:rPr sz="1150" b="0">
+                <a:spcPts val="400"/>
+              </a:spcAft>
+            </a:pPr>
+            <a:r>
+              <a:rPr sz="1250" b="0">
                 <a:solidFill>
                   <a:srgbClr val="E7EAF0"/>
                 </a:solidFill>
                 <a:latin typeface="Segoe UI"/>
               </a:rPr>
-              <a:t>          with a price.</a:t>
+              <a:t>          lists exactly 2 proofs</a:t>
             </a:r>
           </a:p>
           <a:p>
@@ -7826,17 +8027,17 @@
                 <a:spcPts val="0"/>
               </a:spcBef>
               <a:spcAft>
-                <a:spcPts val="350"/>
-              </a:spcAft>
-            </a:pPr>
-            <a:r>
-              <a:rPr sz="1150" b="0">
+                <a:spcPts val="400"/>
+              </a:spcAft>
+            </a:pPr>
+            <a:r>
+              <a:rPr sz="1250" b="0">
                 <a:solidFill>
                   <a:srgbClr val="E7EAF0"/>
                 </a:solidFill>
                 <a:latin typeface="Segoe UI"/>
               </a:rPr>
-              <a:t>Notes: Prices come from the CMS,</a:t>
+              <a:t>Notes: Filtering is a navigation.</a:t>
             </a:r>
           </a:p>
           <a:p>
@@ -7848,17 +8049,17 @@
                 <a:spcPts val="0"/>
               </a:spcBef>
               <a:spcAft>
-                <a:spcPts val="350"/>
-              </a:spcAft>
-            </a:pPr>
-            <a:r>
-              <a:rPr sz="1150" b="0">
-                <a:solidFill>
-                  <a:srgbClr val="E7EAF0"/>
-                </a:solidFill>
-                <a:latin typeface="Segoe UI"/>
-              </a:rPr>
-              <a:t>       not hardcoded.</a:t>
+                <a:spcPts val="400"/>
+              </a:spcAft>
+            </a:pPr>
+            <a:r>
+              <a:rPr sz="1250" b="0">
+                <a:solidFill>
+                  <a:srgbClr val="8C98A8"/>
+                </a:solidFill>
+                <a:latin typeface="Segoe UI"/>
+              </a:rPr>
+              <a:t>---</a:t>
             </a:r>
           </a:p>
           <a:p>
@@ -7870,77 +8071,11 @@
                 <a:spcPts val="0"/>
               </a:spcBef>
               <a:spcAft>
-                <a:spcPts val="350"/>
-              </a:spcAft>
-            </a:pPr>
-            <a:r>
-              <a:rPr sz="1150" b="0">
-                <a:solidFill>
-                  <a:srgbClr val="E7EAF0"/>
-                </a:solidFill>
-                <a:latin typeface="Segoe UI"/>
-              </a:rPr>
-              <a:t/>
-            </a:r>
-          </a:p>
-          <a:p>
-            <a:pPr algn="l">
-              <a:lnSpc>
-                <a:spcPct val="100000"/>
-              </a:lnSpc>
-              <a:spcBef>
-                <a:spcPts val="0"/>
-              </a:spcBef>
-              <a:spcAft>
-                <a:spcPts val="350"/>
-              </a:spcAft>
-            </a:pPr>
-            <a:r>
-              <a:rPr sz="1150" b="0">
-                <a:solidFill>
-                  <a:srgbClr val="8C98A8"/>
-                </a:solidFill>
-                <a:latin typeface="Segoe UI"/>
-              </a:rPr>
-              <a:t>---</a:t>
-            </a:r>
-          </a:p>
-          <a:p>
-            <a:pPr algn="l">
-              <a:lnSpc>
-                <a:spcPct val="100000"/>
-              </a:lnSpc>
-              <a:spcBef>
-                <a:spcPts val="0"/>
-              </a:spcBef>
-              <a:spcAft>
-                <a:spcPts val="350"/>
-              </a:spcAft>
-            </a:pPr>
-            <a:r>
-              <a:rPr sz="1150" b="0">
-                <a:solidFill>
-                  <a:srgbClr val="E7EAF0"/>
-                </a:solidFill>
-                <a:latin typeface="Segoe UI"/>
-              </a:rPr>
-              <a:t/>
-            </a:r>
-          </a:p>
-          <a:p>
-            <a:pPr algn="l">
-              <a:lnSpc>
-                <a:spcPct val="100000"/>
-              </a:lnSpc>
-              <a:spcBef>
-                <a:spcPts val="0"/>
-              </a:spcBef>
-              <a:spcAft>
-                <a:spcPts val="350"/>
-              </a:spcAft>
-            </a:pPr>
-            <a:r>
-              <a:rPr sz="1150" b="0">
+                <a:spcPts val="400"/>
+              </a:spcAft>
+            </a:pPr>
+            <a:r>
+              <a:rPr sz="1250" b="0">
                 <a:solidFill>
                   <a:srgbClr val="8C98A8"/>
                 </a:solidFill>
@@ -7959,8 +8094,8 @@
         </p:nvSpPr>
         <p:spPr>
           <a:xfrm>
-            <a:off x="5961888" y="1737360"/>
-            <a:ext cx="5662879" cy="3200400"/>
+            <a:off x="6099048" y="1627632"/>
+            <a:ext cx="5525719" cy="3017520"/>
           </a:xfrm>
           <a:prstGeom prst="rect">
             <a:avLst/>
@@ -7972,119 +8107,118 @@
             <a:spAutoFit/>
           </a:bodyPr>
           <a:lstStyle/>
-          <a:p/>
-          <a:p>
-            <a:pPr marL="274320" indent="-274320">
+          <a:p>
+            <a:pPr marL="310896" indent="-310896">
               <a:spcBef>
                 <a:spcPts val="0"/>
               </a:spcBef>
               <a:spcAft>
-                <a:spcPts val="900"/>
+                <a:spcPts val="1800"/>
               </a:spcAft>
               <a:buNone/>
             </a:pPr>
             <a:r>
-              <a:rPr sz="1350" b="1">
-                <a:solidFill>
-                  <a:srgbClr val="2EAD33"/>
+              <a:rPr sz="1900" b="1">
+                <a:solidFill>
+                  <a:srgbClr val="1C7896"/>
                 </a:solidFill>
                 <a:latin typeface="Segoe UI"/>
               </a:rPr>
               <a:t>▪   </a:t>
             </a:r>
             <a:r>
-              <a:rPr sz="1350" b="1">
+              <a:rPr sz="1900" b="1">
+                <a:solidFill>
+                  <a:srgbClr val="1C7896"/>
+                </a:solidFill>
+                <a:latin typeface="Segoe UI"/>
+              </a:rPr>
+              <a:t>Plain English.</a:t>
+            </a:r>
+            <a:r>
+              <a:rPr sz="1900">
                 <a:solidFill>
                   <a:srgbClr val="212630"/>
                 </a:solidFill>
                 <a:latin typeface="Segoe UI"/>
               </a:rPr>
-              <a:t>A non-engineer can write and review one. </a:t>
-            </a:r>
-            <a:r>
-              <a:rPr sz="1350">
+              <a:t> Anyone can write and review one.</a:t>
+            </a:r>
+          </a:p>
+          <a:p>
+            <a:pPr marL="310896" indent="-310896">
+              <a:spcBef>
+                <a:spcPts val="0"/>
+              </a:spcBef>
+              <a:spcAft>
+                <a:spcPts val="1800"/>
+              </a:spcAft>
+              <a:buNone/>
+            </a:pPr>
+            <a:r>
+              <a:rPr sz="1900" b="1">
+                <a:solidFill>
+                  <a:srgbClr val="1C7896"/>
+                </a:solidFill>
+                <a:latin typeface="Segoe UI"/>
+              </a:rPr>
+              <a:t>▪   </a:t>
+            </a:r>
+            <a:r>
+              <a:rPr sz="1900" b="1">
+                <a:solidFill>
+                  <a:srgbClr val="1C7896"/>
+                </a:solidFill>
+                <a:latin typeface="Segoe UI"/>
+              </a:rPr>
+              <a:t>Tags come from the file.</a:t>
+            </a:r>
+            <a:r>
+              <a:rPr sz="1900">
                 <a:solidFill>
                   <a:srgbClr val="212630"/>
                 </a:solidFill>
                 <a:latin typeface="Segoe UI"/>
               </a:rPr>
-              <a:t>The scenario is the source of truth, not the generated code.</a:t>
-            </a:r>
-          </a:p>
-          <a:p>
-            <a:pPr marL="274320" indent="-274320">
+              <a:t> Never from the model.</a:t>
+            </a:r>
+          </a:p>
+          <a:p>
+            <a:pPr marL="310896" indent="-310896">
               <a:spcBef>
                 <a:spcPts val="0"/>
               </a:spcBef>
               <a:spcAft>
-                <a:spcPts val="900"/>
+                <a:spcPts val="400"/>
               </a:spcAft>
               <a:buNone/>
             </a:pPr>
             <a:r>
-              <a:rPr sz="1350" b="1">
-                <a:solidFill>
-                  <a:srgbClr val="2EAD33"/>
+              <a:rPr sz="1900" b="1">
+                <a:solidFill>
+                  <a:srgbClr val="1C7896"/>
                 </a:solidFill>
                 <a:latin typeface="Segoe UI"/>
               </a:rPr>
               <a:t>▪   </a:t>
             </a:r>
             <a:r>
-              <a:rPr sz="1350" b="1">
+              <a:rPr sz="1900" b="1">
+                <a:solidFill>
+                  <a:srgbClr val="1C7896"/>
+                </a:solidFill>
+                <a:latin typeface="Segoe UI"/>
+              </a:rPr>
+              <a:t>Generated code sits in a managed region.</a:t>
+            </a:r>
+            <a:r>
+              <a:rPr sz="1900">
                 <a:solidFill>
                   <a:srgbClr val="212630"/>
                 </a:solidFill>
                 <a:latin typeface="Segoe UI"/>
               </a:rPr>
-              <a:t>Each one becomes a real Playwright test, </a:t>
-            </a:r>
-            <a:r>
-              <a:rPr sz="1350">
-                <a:solidFill>
-                  <a:srgbClr val="212630"/>
-                </a:solidFill>
-                <a:latin typeface="Segoe UI"/>
-              </a:rPr>
-              <a:t>tagged for tiered runs.</a:t>
-            </a:r>
-          </a:p>
-          <a:p>
-            <a:pPr marL="274320" indent="-274320">
-              <a:spcBef>
-                <a:spcPts val="0"/>
-              </a:spcBef>
-              <a:spcAft>
-                <a:spcPts val="900"/>
-              </a:spcAft>
-              <a:buNone/>
-            </a:pPr>
-            <a:r>
-              <a:rPr sz="1350" b="1">
-                <a:solidFill>
-                  <a:srgbClr val="2EAD33"/>
-                </a:solidFill>
-                <a:latin typeface="Segoe UI"/>
-              </a:rPr>
-              <a:t>▪   </a:t>
-            </a:r>
-            <a:r>
-              <a:rPr sz="1350" b="1">
-                <a:solidFill>
-                  <a:srgbClr val="212630"/>
-                </a:solidFill>
-                <a:latin typeface="Segoe UI"/>
-              </a:rPr>
-              <a:t>Generated code lives only inside a managed region. </a:t>
-            </a:r>
-            <a:r>
-              <a:rPr sz="1350">
-                <a:solidFill>
-                  <a:srgbClr val="212630"/>
-                </a:solidFill>
-                <a:latin typeface="Segoe UI"/>
-              </a:rPr>
-              <a:t>Between @digest:managed:start and :end. Everything outside it is handwritten and never touched — so a reviewer knows exactly which lines had no author.</a:t>
+              <a:t> Outside it, a human wrote the line.</a:t>
             </a:r>
           </a:p>
         </p:txBody>
@@ -8097,8 +8231,8 @@
         </p:nvSpPr>
         <p:spPr>
           <a:xfrm>
-            <a:off x="5961888" y="4617720"/>
-            <a:ext cx="5662879" cy="457200"/>
+            <a:off x="6099048" y="4224528"/>
+            <a:ext cx="5525719" cy="822960"/>
           </a:xfrm>
           <a:prstGeom prst="rect">
             <a:avLst/>
@@ -8116,17 +8250,17 @@
                 <a:spcPts val="0"/>
               </a:spcBef>
               <a:spcAft>
-                <a:spcPts val="600"/>
-              </a:spcAft>
-            </a:pPr>
-            <a:r>
-              <a:rPr sz="1200" b="0">
-                <a:solidFill>
-                  <a:srgbClr val="171B23"/>
-                </a:solidFill>
-                <a:latin typeface="Segoe UI"/>
-              </a:rPr>
-              <a:t>Four verdicts per scenario</a:t>
+                <a:spcPts val="800"/>
+              </a:spcAft>
+            </a:pPr>
+            <a:r>
+              <a:rPr sz="1350" b="0">
+                <a:solidFill>
+                  <a:srgbClr val="626B7A"/>
+                </a:solidFill>
+                <a:latin typeface="Segoe UI"/>
+              </a:rPr>
+              <a:t>Four verdicts, per scenario</a:t>
             </a:r>
           </a:p>
           <a:p>
@@ -8139,16 +8273,16 @@
               </a:spcAft>
             </a:pPr>
             <a:r>
-              <a:rPr sz="1250" b="1">
-                <a:solidFill>
-                  <a:srgbClr val="1E7A22"/>
+              <a:rPr sz="1600" b="1">
+                <a:solidFill>
+                  <a:srgbClr val="1C7896"/>
                 </a:solidFill>
                 <a:latin typeface="Segoe UI"/>
               </a:rPr>
               <a:t>generated</a:t>
             </a:r>
             <a:r>
-              <a:rPr sz="1250" b="0">
+              <a:rPr sz="1600" b="0">
                 <a:solidFill>
                   <a:srgbClr val="9AA2AE"/>
                 </a:solidFill>
@@ -8157,16 +8291,16 @@
               <a:t>  ·  </a:t>
             </a:r>
             <a:r>
-              <a:rPr sz="1250" b="1">
+              <a:rPr sz="1600" b="1">
                 <a:solidFill>
                   <a:srgbClr val="212630"/>
                 </a:solidFill>
                 <a:latin typeface="Segoe UI"/>
               </a:rPr>
-              <a:t>held</a:t>
-            </a:r>
-            <a:r>
-              <a:rPr sz="1250" b="0">
+              <a:t>kept</a:t>
+            </a:r>
+            <a:r>
+              <a:rPr sz="1600" b="0">
                 <a:solidFill>
                   <a:srgbClr val="9AA2AE"/>
                 </a:solidFill>
@@ -8175,7 +8309,7 @@
               <a:t>  ·  </a:t>
             </a:r>
             <a:r>
-              <a:rPr sz="1250" b="1">
+              <a:rPr sz="1600" b="1">
                 <a:solidFill>
                   <a:srgbClr val="212630"/>
                 </a:solidFill>
@@ -8184,7 +8318,7 @@
               <a:t>covered</a:t>
             </a:r>
             <a:r>
-              <a:rPr sz="1250" b="0">
+              <a:rPr sz="1600" b="0">
                 <a:solidFill>
                   <a:srgbClr val="9AA2AE"/>
                 </a:solidFill>
@@ -8193,13 +8327,13 @@
               <a:t>  ·  </a:t>
             </a:r>
             <a:r>
-              <a:rPr sz="1250" b="1">
+              <a:rPr sz="1600" b="1">
                 <a:solidFill>
                   <a:srgbClr val="B46A00"/>
                 </a:solidFill>
                 <a:latin typeface="Segoe UI"/>
               </a:rPr>
-              <a:t>unbuildable</a:t>
+              <a:t>blocked</a:t>
             </a:r>
           </a:p>
         </p:txBody>
@@ -8213,7 +8347,7 @@
         <p:spPr>
           <a:xfrm>
             <a:off x="566928" y="5230368"/>
-            <a:ext cx="11057839" cy="713232"/>
+            <a:ext cx="11057839" cy="731520"/>
           </a:xfrm>
           <a:prstGeom prst="roundRect">
             <a:avLst>
@@ -8259,13 +8393,13 @@
         <p:spPr>
           <a:xfrm>
             <a:off x="566928" y="5230368"/>
-            <a:ext cx="68580" cy="713232"/>
+            <a:ext cx="64008" cy="731520"/>
           </a:xfrm>
           <a:prstGeom prst="rect">
             <a:avLst/>
           </a:prstGeom>
           <a:solidFill>
-            <a:srgbClr val="2EAD33"/>
+            <a:srgbClr val="43B7DC"/>
           </a:solidFill>
           <a:ln>
             <a:noFill/>
@@ -8302,8 +8436,8 @@
         </p:nvSpPr>
         <p:spPr>
           <a:xfrm>
-            <a:off x="822960" y="5280659"/>
-            <a:ext cx="10600639" cy="612648"/>
+            <a:off x="804672" y="5276088"/>
+            <a:ext cx="10637215" cy="640080"/>
           </a:xfrm>
           <a:prstGeom prst="rect">
             <a:avLst/>
@@ -8318,7 +8452,7 @@
           <a:p>
             <a:pPr algn="l">
               <a:lnSpc>
-                <a:spcPct val="115000"/>
+                <a:spcPct val="112000"/>
               </a:lnSpc>
               <a:spcBef>
                 <a:spcPts val="0"/>
@@ -8328,22 +8462,22 @@
               </a:spcAft>
             </a:pPr>
             <a:r>
-              <a:rPr sz="1350" b="1">
+              <a:rPr sz="1700" b="1">
                 <a:solidFill>
                   <a:srgbClr val="212630"/>
                 </a:solidFill>
                 <a:latin typeface="Segoe UI"/>
               </a:rPr>
-              <a:t>Editing the scenario is the only way to change a generated test. </a:t>
-            </a:r>
-            <a:r>
-              <a:rPr sz="1350" b="0">
+              <a:t>Change the scenario, not the spec. </a:t>
+            </a:r>
+            <a:r>
+              <a:rPr sz="1700" b="0">
                 <a:solidFill>
                   <a:srgbClr val="626B7A"/>
                 </a:solidFill>
                 <a:latin typeface="Segoe UI"/>
               </a:rPr>
-              <a:t>A block's hash is its scenario's text — hash moved, re-digest; hash equal, kept verbatim. Hand-editing the spec is overwritten, on purpose.</a:t>
+              <a:t>Hash moved → re-digest. Hash equal → held verbatim.</a:t>
             </a:r>
           </a:p>
         </p:txBody>
@@ -8356,8 +8490,8 @@
         </p:nvSpPr>
         <p:spPr>
           <a:xfrm>
-            <a:off x="566928" y="6382512"/>
-            <a:ext cx="11057839" cy="274320"/>
+            <a:off x="566928" y="6419088"/>
+            <a:ext cx="11057839" cy="256032"/>
           </a:xfrm>
           <a:prstGeom prst="rect">
             <a:avLst/>
@@ -8425,7 +8559,7 @@
         </p:nvSpPr>
         <p:spPr>
           <a:xfrm>
-            <a:off x="566928" y="384048"/>
+            <a:off x="566928" y="365760"/>
             <a:ext cx="11057839" cy="658368"/>
           </a:xfrm>
           <a:prstGeom prst="rect">
@@ -8448,13 +8582,13 @@
               </a:spcAft>
             </a:pPr>
             <a:r>
-              <a:rPr sz="2900" b="0">
+              <a:rPr sz="2700" b="0">
                 <a:solidFill>
                   <a:srgbClr val="171B23"/>
                 </a:solidFill>
                 <a:latin typeface="Segoe UI"/>
               </a:rPr>
-              <a:t>Assertions live in the page object, never in the spec</a:t>
+              <a:t>Assertions live in the page object</a:t>
             </a:r>
           </a:p>
           <a:p>
@@ -8467,9 +8601,9 @@
               </a:spcAft>
             </a:pPr>
             <a:r>
-              <a:rPr sz="1250" b="0">
-                <a:solidFill>
-                  <a:srgbClr val="1E7A22"/>
+              <a:rPr sz="1150" b="0">
+                <a:solidFill>
+                  <a:srgbClr val="9AA2AE"/>
                 </a:solidFill>
                 <a:latin typeface="Segoe UI"/>
               </a:rPr>
@@ -8486,8 +8620,8 @@
         </p:nvSpPr>
         <p:spPr>
           <a:xfrm>
-            <a:off x="566928" y="1060704"/>
-            <a:ext cx="1051560" cy="50292"/>
+            <a:off x="566928" y="1042415"/>
+            <a:ext cx="777240" cy="41148"/>
           </a:xfrm>
           <a:prstGeom prst="roundRect">
             <a:avLst>
@@ -8495,7 +8629,7 @@
             </a:avLst>
           </a:prstGeom>
           <a:solidFill>
-            <a:srgbClr val="2EAD33"/>
+            <a:srgbClr val="43B7DC"/>
           </a:solidFill>
           <a:ln>
             <a:noFill/>
@@ -8532,8 +8666,8 @@
         </p:nvSpPr>
         <p:spPr>
           <a:xfrm>
-            <a:off x="566928" y="1691640"/>
-            <a:ext cx="6035040" cy="1965960"/>
+            <a:off x="566928" y="1572768"/>
+            <a:ext cx="6126480" cy="2377440"/>
           </a:xfrm>
           <a:prstGeom prst="roundRect">
             <a:avLst>
@@ -8578,8 +8712,8 @@
         </p:nvSpPr>
         <p:spPr>
           <a:xfrm>
-            <a:off x="768096" y="1856232"/>
-            <a:ext cx="5632703" cy="1636776"/>
+            <a:off x="768096" y="1719072"/>
+            <a:ext cx="5724144" cy="2084832"/>
           </a:xfrm>
           <a:prstGeom prst="rect">
             <a:avLst/>
@@ -8600,17 +8734,17 @@
                 <a:spcPts val="0"/>
               </a:spcBef>
               <a:spcAft>
-                <a:spcPts val="350"/>
-              </a:spcAft>
-            </a:pPr>
-            <a:r>
-              <a:rPr sz="1150" b="0">
+                <a:spcPts val="400"/>
+              </a:spcAft>
+            </a:pPr>
+            <a:r>
+              <a:rPr sz="1350" b="0">
                 <a:solidFill>
                   <a:srgbClr val="E7EAF0"/>
                 </a:solidFill>
                 <a:latin typeface="Segoe UI"/>
               </a:rPr>
-              <a:t>test('The pricing section lists all six packages',</a:t>
+              <a:t>test('A category filter narrows the gallery',</a:t>
             </a:r>
           </a:p>
           <a:p>
@@ -8622,11 +8756,11 @@
                 <a:spcPts val="0"/>
               </a:spcBef>
               <a:spcAft>
-                <a:spcPts val="350"/>
-              </a:spcAft>
-            </a:pPr>
-            <a:r>
-              <a:rPr sz="1150" b="0">
+                <a:spcPts val="400"/>
+              </a:spcAft>
+            </a:pPr>
+            <a:r>
+              <a:rPr sz="1350" b="0">
                 <a:solidFill>
                   <a:srgbClr val="E7EAF0"/>
                 </a:solidFill>
@@ -8644,17 +8778,17 @@
                 <a:spcPts val="0"/>
               </a:spcBef>
               <a:spcAft>
-                <a:spcPts val="350"/>
-              </a:spcAft>
-            </a:pPr>
-            <a:r>
-              <a:rPr sz="1150" b="0">
+                <a:spcPts val="400"/>
+              </a:spcAft>
+            </a:pPr>
+            <a:r>
+              <a:rPr sz="1350" b="0">
                 <a:solidFill>
                   <a:srgbClr val="E7EAF0"/>
                 </a:solidFill>
                 <a:latin typeface="Segoe UI"/>
               </a:rPr>
-              <a:t>     async ({ landingPage }) =&gt; {</a:t>
+              <a:t>     async ({ page }) =&gt; {</a:t>
             </a:r>
           </a:p>
           <a:p>
@@ -8666,17 +8800,17 @@
                 <a:spcPts val="0"/>
               </a:spcBef>
               <a:spcAft>
-                <a:spcPts val="350"/>
-              </a:spcAft>
-            </a:pPr>
-            <a:r>
-              <a:rPr sz="1150" b="0">
+                <a:spcPts val="400"/>
+              </a:spcAft>
+            </a:pPr>
+            <a:r>
+              <a:rPr sz="1350" b="0">
                 <a:solidFill>
                   <a:srgbClr val="E7EAF0"/>
                 </a:solidFill>
                 <a:latin typeface="Segoe UI"/>
               </a:rPr>
-              <a:t>  await landingPage.goto();</a:t>
+              <a:t>  const gallery = new GalleryPage(page);</a:t>
             </a:r>
           </a:p>
           <a:p>
@@ -8688,17 +8822,17 @@
                 <a:spcPts val="0"/>
               </a:spcBef>
               <a:spcAft>
-                <a:spcPts val="350"/>
-              </a:spcAft>
-            </a:pPr>
-            <a:r>
-              <a:rPr sz="1150" b="0">
+                <a:spcPts val="400"/>
+              </a:spcAft>
+            </a:pPr>
+            <a:r>
+              <a:rPr sz="1350" b="0">
                 <a:solidFill>
                   <a:srgbClr val="E7EAF0"/>
                 </a:solidFill>
                 <a:latin typeface="Segoe UI"/>
               </a:rPr>
-              <a:t>  await landingPage.expectPricingListsAllPackages();</a:t>
+              <a:t>  await gallery.goto();</a:t>
             </a:r>
           </a:p>
           <a:p>
@@ -8710,11 +8844,55 @@
                 <a:spcPts val="0"/>
               </a:spcBef>
               <a:spcAft>
-                <a:spcPts val="350"/>
-              </a:spcAft>
-            </a:pPr>
-            <a:r>
-              <a:rPr sz="1150" b="0">
+                <a:spcPts val="400"/>
+              </a:spcAft>
+            </a:pPr>
+            <a:r>
+              <a:rPr sz="1350" b="0">
+                <a:solidFill>
+                  <a:srgbClr val="E7EAF0"/>
+                </a:solidFill>
+                <a:latin typeface="Segoe UI"/>
+              </a:rPr>
+              <a:t>  await gallery.filterByCategory('macro');</a:t>
+            </a:r>
+          </a:p>
+          <a:p>
+            <a:pPr algn="l">
+              <a:lnSpc>
+                <a:spcPct val="100000"/>
+              </a:lnSpc>
+              <a:spcBef>
+                <a:spcPts val="0"/>
+              </a:spcBef>
+              <a:spcAft>
+                <a:spcPts val="400"/>
+              </a:spcAft>
+            </a:pPr>
+            <a:r>
+              <a:rPr sz="1350" b="0">
+                <a:solidFill>
+                  <a:srgbClr val="E7EAF0"/>
+                </a:solidFill>
+                <a:latin typeface="Segoe UI"/>
+              </a:rPr>
+              <a:t>  await gallery.expectCardCount(2);</a:t>
+            </a:r>
+          </a:p>
+          <a:p>
+            <a:pPr algn="l">
+              <a:lnSpc>
+                <a:spcPct val="100000"/>
+              </a:lnSpc>
+              <a:spcBef>
+                <a:spcPts val="0"/>
+              </a:spcBef>
+              <a:spcAft>
+                <a:spcPts val="400"/>
+              </a:spcAft>
+            </a:pPr>
+            <a:r>
+              <a:rPr sz="1350" b="0">
                 <a:solidFill>
                   <a:srgbClr val="E7EAF0"/>
                 </a:solidFill>
@@ -8733,8 +8911,8 @@
         </p:nvSpPr>
         <p:spPr>
           <a:xfrm>
-            <a:off x="566928" y="3822191"/>
-            <a:ext cx="6035040" cy="1920240"/>
+            <a:off x="566928" y="4224528"/>
+            <a:ext cx="6126480" cy="1920240"/>
           </a:xfrm>
           <a:prstGeom prst="rect">
             <a:avLst/>
@@ -8747,79 +8925,79 @@
           </a:bodyPr>
           <a:lstStyle/>
           <a:p>
-            <a:pPr marL="274320" indent="-274320">
+            <a:pPr marL="310896" indent="-310896">
               <a:spcBef>
                 <a:spcPts val="0"/>
               </a:spcBef>
               <a:spcAft>
-                <a:spcPts val="900"/>
+                <a:spcPts val="1800"/>
               </a:spcAft>
               <a:buNone/>
             </a:pPr>
             <a:r>
-              <a:rPr sz="1300" b="1">
-                <a:solidFill>
-                  <a:srgbClr val="2EAD33"/>
+              <a:rPr sz="1800" b="1">
+                <a:solidFill>
+                  <a:srgbClr val="1C7896"/>
                 </a:solidFill>
                 <a:latin typeface="Segoe UI"/>
               </a:rPr>
               <a:t>▪   </a:t>
             </a:r>
             <a:r>
-              <a:rPr sz="1300" b="1">
+              <a:rPr sz="1800" b="1">
+                <a:solidFill>
+                  <a:srgbClr val="1C7896"/>
+                </a:solidFill>
+                <a:latin typeface="Segoe UI"/>
+              </a:rPr>
+              <a:t>A spec navigates and calls intent methods.</a:t>
+            </a:r>
+            <a:r>
+              <a:rPr sz="1800">
                 <a:solidFill>
                   <a:srgbClr val="212630"/>
                 </a:solidFill>
                 <a:latin typeface="Segoe UI"/>
               </a:rPr>
-              <a:t>A spec navigates and calls intent-naming methods. </a:t>
-            </a:r>
-            <a:r>
-              <a:rPr sz="1300">
+              <a:t> No expect, no page.locator, no setViewportSize.</a:t>
+            </a:r>
+          </a:p>
+          <a:p>
+            <a:pPr marL="310896" indent="-310896">
+              <a:spcBef>
+                <a:spcPts val="0"/>
+              </a:spcBef>
+              <a:spcAft>
+                <a:spcPts val="400"/>
+              </a:spcAft>
+              <a:buNone/>
+            </a:pPr>
+            <a:r>
+              <a:rPr sz="1800" b="1">
+                <a:solidFill>
+                  <a:srgbClr val="1C7896"/>
+                </a:solidFill>
+                <a:latin typeface="Segoe UI"/>
+              </a:rPr>
+              <a:t>▪   </a:t>
+            </a:r>
+            <a:r>
+              <a:rPr sz="1800" b="1">
+                <a:solidFill>
+                  <a:srgbClr val="1C7896"/>
+                </a:solidFill>
+                <a:latin typeface="Segoe UI"/>
+              </a:rPr>
+              <a:t>Every assertion carries a message.</a:t>
+            </a:r>
+            <a:r>
+              <a:rPr sz="1800">
                 <a:solidFill>
                   <a:srgbClr val="212630"/>
                 </a:solidFill>
                 <a:latin typeface="Segoe UI"/>
               </a:rPr>
-              <a:t>That is its whole job. No page.locator, no setViewportSize, no expect.</a:t>
-            </a:r>
-          </a:p>
-          <a:p>
-            <a:pPr marL="274320" indent="-274320">
-              <a:spcBef>
-                <a:spcPts val="0"/>
-              </a:spcBef>
-              <a:spcAft>
-                <a:spcPts val="900"/>
-              </a:spcAft>
-              <a:buNone/>
-            </a:pPr>
-            <a:r>
-              <a:rPr sz="1300" b="1">
-                <a:solidFill>
-                  <a:srgbClr val="2EAD33"/>
-                </a:solidFill>
-                <a:latin typeface="Segoe UI"/>
-              </a:rPr>
-              <a:t>▪   </a:t>
-            </a:r>
-            <a:r>
-              <a:rPr sz="1300" b="1">
-                <a:solidFill>
-                  <a:srgbClr val="212630"/>
-                </a:solidFill>
-                <a:latin typeface="Segoe UI"/>
-              </a:rPr>
-              <a:t>Every assertion carries a message, </a:t>
-            </a:r>
-            <a:r>
-              <a:rPr sz="1300">
-                <a:solidFill>
-                  <a:srgbClr val="212630"/>
-                </a:solidFill>
-                <a:latin typeface="Segoe UI"/>
-              </a:rPr>
-              <a:t>so a failure reads as intent — not as two locator strings.</a:t>
+              <a:t> A failure reads as intent, not as two locator strings.</a:t>
             </a:r>
           </a:p>
         </p:txBody>
@@ -8832,8 +9010,8 @@
         </p:nvSpPr>
         <p:spPr>
           <a:xfrm>
-            <a:off x="6967728" y="1737360"/>
-            <a:ext cx="4657039" cy="4023360"/>
+            <a:off x="7059168" y="1627632"/>
+            <a:ext cx="4565599" cy="4480560"/>
           </a:xfrm>
           <a:prstGeom prst="rect">
             <a:avLst/>
@@ -8851,13 +9029,13 @@
                 <a:spcPts val="0"/>
               </a:spcBef>
               <a:spcAft>
-                <a:spcPts val="1000"/>
-              </a:spcAft>
-            </a:pPr>
-            <a:r>
-              <a:rPr sz="1500" b="0">
-                <a:solidFill>
-                  <a:srgbClr val="171B23"/>
+                <a:spcPts val="1400"/>
+              </a:spcAft>
+            </a:pPr>
+            <a:r>
+              <a:rPr sz="1450" b="0">
+                <a:solidFill>
+                  <a:srgbClr val="626B7A"/>
                 </a:solidFill>
                 <a:latin typeface="Segoe UI"/>
               </a:rPr>
@@ -8865,117 +9043,155 @@
             </a:r>
           </a:p>
           <a:p>
-            <a:pPr marL="274320" indent="-274320">
+            <a:pPr marL="310896" indent="-310896">
               <a:spcBef>
                 <a:spcPts val="0"/>
               </a:spcBef>
               <a:spcAft>
-                <a:spcPts val="900"/>
+                <a:spcPts val="2000"/>
               </a:spcAft>
               <a:buNone/>
             </a:pPr>
             <a:r>
-              <a:rPr sz="1250" b="1">
-                <a:solidFill>
-                  <a:srgbClr val="2EAD33"/>
+              <a:rPr sz="1700" b="1">
+                <a:solidFill>
+                  <a:srgbClr val="3A539E"/>
                 </a:solidFill>
                 <a:latin typeface="Segoe UI"/>
               </a:rPr>
               <a:t>▪   </a:t>
             </a:r>
             <a:r>
-              <a:rPr sz="1250" b="1">
+              <a:rPr sz="1700" b="1">
+                <a:solidFill>
+                  <a:srgbClr val="3A539E"/>
+                </a:solidFill>
+                <a:latin typeface="Segoe UI"/>
+              </a:rPr>
+              <a:t>The page object is the capability index.</a:t>
+            </a:r>
+            <a:r>
+              <a:rPr sz="1700">
                 <a:solidFill>
                   <a:srgbClr val="212630"/>
                 </a:solidFill>
                 <a:latin typeface="Segoe UI"/>
               </a:rPr>
-              <a:t>The page object is the capability index. </a:t>
-            </a:r>
-            <a:r>
-              <a:rPr sz="1250">
+              <a:t> Cannot express it → blocked, and no test is written.</a:t>
+            </a:r>
+          </a:p>
+          <a:p>
+            <a:pPr marL="310896" indent="-310896">
+              <a:spcBef>
+                <a:spcPts val="0"/>
+              </a:spcBef>
+              <a:spcAft>
+                <a:spcPts val="2000"/>
+              </a:spcAft>
+              <a:buNone/>
+            </a:pPr>
+            <a:r>
+              <a:rPr sz="1700" b="1">
+                <a:solidFill>
+                  <a:srgbClr val="3A539E"/>
+                </a:solidFill>
+                <a:latin typeface="Segoe UI"/>
+              </a:rPr>
+              <a:t>▪   </a:t>
+            </a:r>
+            <a:r>
+              <a:rPr sz="1700" b="1">
+                <a:solidFill>
+                  <a:srgbClr val="3A539E"/>
+                </a:solidFill>
+                <a:latin typeface="Segoe UI"/>
+              </a:rPr>
+              <a:t>Blocked names what to add.</a:t>
+            </a:r>
+            <a:r>
+              <a:rPr sz="1700">
                 <a:solidFill>
                   <a:srgbClr val="212630"/>
                 </a:solidFill>
                 <a:latin typeface="Segoe UI"/>
               </a:rPr>
-              <a:t>A scenario the POM cannot express is classified unbuildable, skips generation, and becomes a stage-4 work order instead of a test.</a:t>
-            </a:r>
-          </a:p>
-          <a:p>
-            <a:pPr marL="274320" indent="-274320">
+              <a:t> A stage-4 work order, not a dead end.</a:t>
+            </a:r>
+          </a:p>
+          <a:p>
+            <a:pPr marL="310896" indent="-310896">
               <a:spcBef>
                 <a:spcPts val="0"/>
               </a:spcBef>
               <a:spcAft>
-                <a:spcPts val="900"/>
+                <a:spcPts val="2000"/>
               </a:spcAft>
               <a:buNone/>
             </a:pPr>
             <a:r>
-              <a:rPr sz="1250" b="1">
-                <a:solidFill>
-                  <a:srgbClr val="2EAD33"/>
+              <a:rPr sz="1700" b="1">
+                <a:solidFill>
+                  <a:srgbClr val="3A539E"/>
                 </a:solidFill>
                 <a:latin typeface="Segoe UI"/>
               </a:rPr>
               <a:t>▪   </a:t>
             </a:r>
             <a:r>
-              <a:rPr sz="1250" b="1">
+              <a:rPr sz="1700" b="1">
+                <a:solidFill>
+                  <a:srgbClr val="3A539E"/>
+                </a:solidFill>
+                <a:latin typeface="Segoe UI"/>
+              </a:rPr>
+              <a:t>Only public members count.</a:t>
+            </a:r>
+            <a:r>
+              <a:rPr sz="1700">
                 <a:solidFill>
                   <a:srgbClr val="212630"/>
                 </a:solidFill>
                 <a:latin typeface="Segoe UI"/>
               </a:rPr>
-              <a:t>That is the second gate. </a:t>
-            </a:r>
-            <a:r>
-              <a:rPr sz="1250">
+              <a:t> A private helper is not a capability.</a:t>
+            </a:r>
+          </a:p>
+          <a:p>
+            <a:pPr marL="310896" indent="-310896">
+              <a:spcBef>
+                <a:spcPts val="0"/>
+              </a:spcBef>
+              <a:spcAft>
+                <a:spcPts val="400"/>
+              </a:spcAft>
+              <a:buNone/>
+            </a:pPr>
+            <a:r>
+              <a:rPr sz="1700" b="1">
+                <a:solidFill>
+                  <a:srgbClr val="3A539E"/>
+                </a:solidFill>
+                <a:latin typeface="Segoe UI"/>
+              </a:rPr>
+              <a:t>▪   </a:t>
+            </a:r>
+            <a:r>
+              <a:rPr sz="1700" b="1">
+                <a:solidFill>
+                  <a:srgbClr val="3A539E"/>
+                </a:solidFill>
+                <a:latin typeface="Segoe UI"/>
+              </a:rPr>
+              <a:t>Stage 3 drives the live app</a:t>
+            </a:r>
+            <a:r>
+              <a:rPr sz="1700">
                 <a:solidFill>
                   <a:srgbClr val="212630"/>
                 </a:solidFill>
                 <a:latin typeface="Segoe UI"/>
               </a:rPr>
-              <a:t>'Is it already covered?' is not enough — if the POM cannot express the novel part, generation would drop exactly the behaviour that made the scenario worth writing, and leave a duplicate that still passes.</a:t>
-            </a:r>
-          </a:p>
-          <a:p>
-            <a:pPr marL="274320" indent="-274320">
-              <a:spcBef>
-                <a:spcPts val="0"/>
-              </a:spcBef>
-              <a:spcAft>
-                <a:spcPts val="900"/>
-              </a:spcAft>
-              <a:buNone/>
-            </a:pPr>
-            <a:r>
-              <a:rPr sz="1250" b="1">
-                <a:solidFill>
-                  <a:srgbClr val="2EAD33"/>
-                </a:solidFill>
-                <a:latin typeface="Segoe UI"/>
-              </a:rPr>
-              <a:t>▪   </a:t>
-            </a:r>
-            <a:r>
-              <a:rPr sz="1250" b="1">
-                <a:solidFill>
-                  <a:srgbClr val="212630"/>
-                </a:solidFill>
-                <a:latin typeface="Segoe UI"/>
-              </a:rPr>
-              <a:t>Stage 3 drives the live app </a:t>
-            </a:r>
-            <a:r>
-              <a:rPr sz="1250">
-                <a:solidFill>
-                  <a:srgbClr val="212630"/>
-                </a:solidFill>
-                <a:latin typeface="Segoe UI"/>
-              </a:rPr>
-              <a:t>and appends what it learns to that domain's instruction.md.</a:t>
+              <a:t> and appends what it learned to instruction.md.</a:t>
             </a:r>
           </a:p>
         </p:txBody>
@@ -8988,8 +9204,8 @@
         </p:nvSpPr>
         <p:spPr>
           <a:xfrm>
-            <a:off x="566928" y="6382512"/>
-            <a:ext cx="11057839" cy="274320"/>
+            <a:off x="566928" y="6419088"/>
+            <a:ext cx="11057839" cy="256032"/>
           </a:xfrm>
           <a:prstGeom prst="rect">
             <a:avLst/>
@@ -9057,7 +9273,7 @@
         </p:nvSpPr>
         <p:spPr>
           <a:xfrm>
-            <a:off x="566928" y="384048"/>
+            <a:off x="566928" y="365760"/>
             <a:ext cx="11057839" cy="658368"/>
           </a:xfrm>
           <a:prstGeom prst="rect">
@@ -9080,7 +9296,7 @@
               </a:spcAft>
             </a:pPr>
             <a:r>
-              <a:rPr sz="2900" b="0">
+              <a:rPr sz="2700" b="0">
                 <a:solidFill>
                   <a:srgbClr val="171B23"/>
                 </a:solidFill>
@@ -9099,9 +9315,9 @@
               </a:spcAft>
             </a:pPr>
             <a:r>
-              <a:rPr sz="1250" b="0">
-                <a:solidFill>
-                  <a:srgbClr val="1E7A22"/>
+              <a:rPr sz="1150" b="0">
+                <a:solidFill>
+                  <a:srgbClr val="9AA2AE"/>
                 </a:solidFill>
                 <a:latin typeface="Segoe UI"/>
               </a:rPr>
@@ -9118,8 +9334,8 @@
         </p:nvSpPr>
         <p:spPr>
           <a:xfrm>
-            <a:off x="566928" y="1060704"/>
-            <a:ext cx="1051560" cy="50292"/>
+            <a:off x="566928" y="1042415"/>
+            <a:ext cx="777240" cy="41148"/>
           </a:xfrm>
           <a:prstGeom prst="roundRect">
             <a:avLst>
@@ -9127,7 +9343,7 @@
             </a:avLst>
           </a:prstGeom>
           <a:solidFill>
-            <a:srgbClr val="2EAD33"/>
+            <a:srgbClr val="43B7DC"/>
           </a:solidFill>
           <a:ln>
             <a:noFill/>
@@ -9164,8 +9380,8 @@
         </p:nvSpPr>
         <p:spPr>
           <a:xfrm>
-            <a:off x="566928" y="1691640"/>
-            <a:ext cx="11057839" cy="2834640"/>
+            <a:off x="566928" y="1554480"/>
+            <a:ext cx="11057839" cy="3383280"/>
           </a:xfrm>
           <a:prstGeom prst="rect">
             <a:avLst/>
@@ -9178,155 +9394,193 @@
           </a:bodyPr>
           <a:lstStyle/>
           <a:p>
-            <a:pPr marL="274320" indent="-274320">
+            <a:pPr marL="310896" indent="-310896">
               <a:spcBef>
                 <a:spcPts val="0"/>
               </a:spcBef>
               <a:spcAft>
-                <a:spcPts val="800"/>
+                <a:spcPts val="1400"/>
               </a:spcAft>
               <a:buNone/>
             </a:pPr>
             <a:r>
-              <a:rPr sz="1350" b="1">
-                <a:solidFill>
-                  <a:srgbClr val="2EAD33"/>
+              <a:rPr sz="1900" b="1">
+                <a:solidFill>
+                  <a:srgbClr val="1C7896"/>
                 </a:solidFill>
                 <a:latin typeface="Segoe UI"/>
               </a:rPr>
               <a:t>▪   </a:t>
             </a:r>
             <a:r>
-              <a:rPr sz="1350" b="1">
+              <a:rPr sz="1900" b="1">
+                <a:solidFill>
+                  <a:srgbClr val="1C7896"/>
+                </a:solidFill>
+                <a:latin typeface="Segoe UI"/>
+              </a:rPr>
+              <a:t>Tags come from the scenario.</a:t>
+            </a:r>
+            <a:r>
+              <a:rPr sz="1900">
                 <a:solidFill>
                   <a:srgbClr val="212630"/>
                 </a:solidFill>
                 <a:latin typeface="Segoe UI"/>
               </a:rPr>
-              <a:t>Tags come from the scenario file and are written by the machinery — </a:t>
-            </a:r>
-            <a:r>
-              <a:rPr sz="1350">
+              <a:t> A model that forgot one would hand you a smaller green run.</a:t>
+            </a:r>
+          </a:p>
+          <a:p>
+            <a:pPr marL="310896" indent="-310896">
+              <a:spcBef>
+                <a:spcPts val="0"/>
+              </a:spcBef>
+              <a:spcAft>
+                <a:spcPts val="1400"/>
+              </a:spcAft>
+              <a:buNone/>
+            </a:pPr>
+            <a:r>
+              <a:rPr sz="1900" b="1">
+                <a:solidFill>
+                  <a:srgbClr val="1C7896"/>
+                </a:solidFill>
+                <a:latin typeface="Segoe UI"/>
+              </a:rPr>
+              <a:t>▪   </a:t>
+            </a:r>
+            <a:r>
+              <a:rPr sz="1900" b="1">
+                <a:solidFill>
+                  <a:srgbClr val="1C7896"/>
+                </a:solidFill>
+                <a:latin typeface="Segoe UI"/>
+              </a:rPr>
+              <a:t>The agent proposes; the code decides.</a:t>
+            </a:r>
+            <a:r>
+              <a:rPr sz="1900">
                 <a:solidFill>
                   <a:srgbClr val="212630"/>
                 </a:solidFill>
                 <a:latin typeface="Segoe UI"/>
               </a:rPr>
-              <a:t>never trusted to the model. A model that forgets a tag would produce a smaller green run, which is not an error anyone sees.</a:t>
-            </a:r>
-          </a:p>
-          <a:p>
-            <a:pPr marL="274320" indent="-274320">
+              <a:t> smoke · sanity · regression — a name, never a grep.</a:t>
+            </a:r>
+          </a:p>
+          <a:p>
+            <a:pPr marL="310896" indent="-310896">
               <a:spcBef>
                 <a:spcPts val="0"/>
               </a:spcBef>
               <a:spcAft>
-                <a:spcPts val="800"/>
+                <a:spcPts val="1400"/>
               </a:spcAft>
               <a:buNone/>
             </a:pPr>
             <a:r>
-              <a:rPr sz="1350" b="1">
-                <a:solidFill>
-                  <a:srgbClr val="2EAD33"/>
+              <a:rPr sz="1900" b="1">
+                <a:solidFill>
+                  <a:srgbClr val="1C7896"/>
                 </a:solidFill>
                 <a:latin typeface="Segoe UI"/>
               </a:rPr>
               <a:t>▪   </a:t>
             </a:r>
             <a:r>
-              <a:rPr sz="1350" b="1">
+              <a:rPr sz="1900" b="1">
+                <a:solidFill>
+                  <a:srgbClr val="1C7896"/>
+                </a:solidFill>
+                <a:latin typeface="Segoe UI"/>
+              </a:rPr>
+              <a:t>Tag filter, not title filter.</a:t>
+            </a:r>
+            <a:r>
+              <a:rPr sz="1900">
                 <a:solidFill>
                   <a:srgbClr val="212630"/>
                 </a:solidFill>
                 <a:latin typeface="Segoe UI"/>
               </a:rPr>
-              <a:t>A tiered run selects by tag, not by title. </a:t>
-            </a:r>
-            <a:r>
-              <a:rPr sz="1350">
+              <a:t> A rewritten title cannot drop a test.</a:t>
+            </a:r>
+          </a:p>
+          <a:p>
+            <a:pPr marL="310896" indent="-310896">
+              <a:spcBef>
+                <a:spcPts val="0"/>
+              </a:spcBef>
+              <a:spcAft>
+                <a:spcPts val="1400"/>
+              </a:spcAft>
+              <a:buNone/>
+            </a:pPr>
+            <a:r>
+              <a:rPr sz="1900" b="1">
+                <a:solidFill>
+                  <a:srgbClr val="1C7896"/>
+                </a:solidFill>
+                <a:latin typeface="Segoe UI"/>
+              </a:rPr>
+              <a:t>▪   </a:t>
+            </a:r>
+            <a:r>
+              <a:rPr sz="1900" b="1">
+                <a:solidFill>
+                  <a:srgbClr val="1C7896"/>
+                </a:solidFill>
+                <a:latin typeface="Segoe UI"/>
+              </a:rPr>
+              <a:t>Everything generated this run always runs.</a:t>
+            </a:r>
+            <a:r>
+              <a:rPr sz="1900">
                 <a:solidFill>
                   <a:srgbClr val="212630"/>
                 </a:solidFill>
                 <a:latin typeface="Segoe UI"/>
               </a:rPr>
-              <a:t>npm run stage:6 -- --grep @core. A title filter would drop a test the moment a generated title disagreed with its scenario title — silently, as a smaller green run.</a:t>
-            </a:r>
-          </a:p>
-          <a:p>
-            <a:pPr marL="274320" indent="-274320">
+              <a:t> Stage 2 stamps @YYYYMMDD, the planner puts it in the grep.</a:t>
+            </a:r>
+          </a:p>
+          <a:p>
+            <a:pPr marL="310896" indent="-310896">
               <a:spcBef>
                 <a:spcPts val="0"/>
               </a:spcBef>
               <a:spcAft>
-                <a:spcPts val="800"/>
+                <a:spcPts val="400"/>
               </a:spcAft>
               <a:buNone/>
             </a:pPr>
             <a:r>
-              <a:rPr sz="1350" b="1">
-                <a:solidFill>
-                  <a:srgbClr val="2EAD33"/>
+              <a:rPr sz="1900" b="1">
+                <a:solidFill>
+                  <a:srgbClr val="1C7896"/>
                 </a:solidFill>
                 <a:latin typeface="Segoe UI"/>
               </a:rPr>
               <a:t>▪   </a:t>
             </a:r>
             <a:r>
-              <a:rPr sz="1350" b="1">
+              <a:rPr sz="1900" b="1">
+                <a:solidFill>
+                  <a:srgbClr val="1C7896"/>
+                </a:solidFill>
+                <a:latin typeface="Segoe UI"/>
+              </a:rPr>
+              <a:t>A human's TEST_GREP wins outright.</a:t>
+            </a:r>
+            <a:r>
+              <a:rPr sz="1900">
                 <a:solidFill>
                   <a:srgbClr val="212630"/>
                 </a:solidFill>
                 <a:latin typeface="Segoe UI"/>
               </a:rPr>
-              <a:t>An untagged test is invisible to a tiered run — </a:t>
-            </a:r>
-            <a:r>
-              <a:rPr sz="1350">
-                <a:solidFill>
-                  <a:srgbClr val="212630"/>
-                </a:solidFill>
-                <a:latin typeface="Segoe UI"/>
-              </a:rPr>
-              <a:t>and the run summary says so out loud, rather than letting you assume it was included.</a:t>
-            </a:r>
-          </a:p>
-          <a:p>
-            <a:pPr marL="274320" indent="-274320">
-              <a:spcBef>
-                <a:spcPts val="0"/>
-              </a:spcBef>
-              <a:spcAft>
-                <a:spcPts val="800"/>
-              </a:spcAft>
-              <a:buNone/>
-            </a:pPr>
-            <a:r>
-              <a:rPr sz="1350" b="1">
-                <a:solidFill>
-                  <a:srgbClr val="2EAD33"/>
-                </a:solidFill>
-                <a:latin typeface="Segoe UI"/>
-              </a:rPr>
-              <a:t>▪   </a:t>
-            </a:r>
-            <a:r>
-              <a:rPr sz="1350" b="1">
-                <a:solidFill>
-                  <a:srgbClr val="212630"/>
-                </a:solidFill>
-                <a:latin typeface="Segoe UI"/>
-              </a:rPr>
-              <a:t>The planner fails open. </a:t>
-            </a:r>
-            <a:r>
-              <a:rPr sz="1350">
-                <a:solidFill>
-                  <a:srgbClr val="212630"/>
-                </a:solidFill>
-                <a:latin typeface="Segoe UI"/>
-              </a:rPr>
-              <a:t>Any degraded input widens the run to the full suite with a named reason, plus an enforced floor: the core tier and every title generated this run.</a:t>
+              <a:t> Agent skipped, floor waived — and the report says so.</a:t>
             </a:r>
           </a:p>
         </p:txBody>
@@ -9339,8 +9593,8 @@
         </p:nvSpPr>
         <p:spPr>
           <a:xfrm>
-            <a:off x="566928" y="4892040"/>
-            <a:ext cx="11057839" cy="713232"/>
+            <a:off x="566928" y="5047488"/>
+            <a:ext cx="11057839" cy="768096"/>
           </a:xfrm>
           <a:prstGeom prst="roundRect">
             <a:avLst>
@@ -9385,8 +9639,8 @@
         </p:nvSpPr>
         <p:spPr>
           <a:xfrm>
-            <a:off x="566928" y="4892040"/>
-            <a:ext cx="68580" cy="713232"/>
+            <a:off x="566928" y="5047488"/>
+            <a:ext cx="64008" cy="768096"/>
           </a:xfrm>
           <a:prstGeom prst="rect">
             <a:avLst/>
@@ -9429,8 +9683,8 @@
         </p:nvSpPr>
         <p:spPr>
           <a:xfrm>
-            <a:off x="822960" y="4942331"/>
-            <a:ext cx="10600639" cy="612648"/>
+            <a:off x="804672" y="5093207"/>
+            <a:ext cx="10637215" cy="676656"/>
           </a:xfrm>
           <a:prstGeom prst="rect">
             <a:avLst/>
@@ -9445,7 +9699,7 @@
           <a:p>
             <a:pPr algn="l">
               <a:lnSpc>
-                <a:spcPct val="115000"/>
+                <a:spcPct val="112000"/>
               </a:lnSpc>
               <a:spcBef>
                 <a:spcPts val="0"/>
@@ -9455,22 +9709,22 @@
               </a:spcAft>
             </a:pPr>
             <a:r>
-              <a:rPr sz="1350" b="1">
-                <a:solidFill>
-                  <a:srgbClr val="212630"/>
+              <a:rPr sz="1700" b="1">
+                <a:solidFill>
+                  <a:srgbClr val="B46A00"/>
                 </a:solidFill>
                 <a:latin typeface="Segoe UI"/>
               </a:rPr>
               <a:t>The failure to watch for is not a red run. </a:t>
             </a:r>
             <a:r>
-              <a:rPr sz="1350" b="0">
+              <a:rPr sz="1700" b="0">
                 <a:solidFill>
                   <a:srgbClr val="626B7A"/>
                 </a:solidFill>
                 <a:latin typeface="Segoe UI"/>
               </a:rPr>
-              <a:t>It is a smaller green run — everything that ran passed, and the test that would have failed never ran at all.</a:t>
+              <a:t>It is a smaller green run: all that ran passed, and the test that would have failed never ran.</a:t>
             </a:r>
           </a:p>
         </p:txBody>
@@ -9483,8 +9737,8 @@
         </p:nvSpPr>
         <p:spPr>
           <a:xfrm>
-            <a:off x="566928" y="6382512"/>
-            <a:ext cx="11057839" cy="274320"/>
+            <a:off x="566928" y="6419088"/>
+            <a:ext cx="11057839" cy="256032"/>
           </a:xfrm>
           <a:prstGeom prst="rect">
             <a:avLst/>
@@ -9552,7 +9806,7 @@
         </p:nvSpPr>
         <p:spPr>
           <a:xfrm>
-            <a:off x="566928" y="384048"/>
+            <a:off x="566928" y="365760"/>
             <a:ext cx="11057839" cy="658368"/>
           </a:xfrm>
           <a:prstGeom prst="rect">
@@ -9575,7 +9829,7 @@
               </a:spcAft>
             </a:pPr>
             <a:r>
-              <a:rPr sz="2900" b="0">
+              <a:rPr sz="2700" b="0">
                 <a:solidFill>
                   <a:srgbClr val="171B23"/>
                 </a:solidFill>
@@ -9594,9 +9848,9 @@
               </a:spcAft>
             </a:pPr>
             <a:r>
-              <a:rPr sz="1250" b="0">
-                <a:solidFill>
-                  <a:srgbClr val="1E7A22"/>
+              <a:rPr sz="1150" b="0">
+                <a:solidFill>
+                  <a:srgbClr val="9AA2AE"/>
                 </a:solidFill>
                 <a:latin typeface="Segoe UI"/>
               </a:rPr>
@@ -9613,8 +9867,8 @@
         </p:nvSpPr>
         <p:spPr>
           <a:xfrm>
-            <a:off x="566928" y="1060704"/>
-            <a:ext cx="1051560" cy="50292"/>
+            <a:off x="566928" y="1042415"/>
+            <a:ext cx="777240" cy="41148"/>
           </a:xfrm>
           <a:prstGeom prst="roundRect">
             <a:avLst>
@@ -9622,7 +9876,7 @@
             </a:avLst>
           </a:prstGeom>
           <a:solidFill>
-            <a:srgbClr val="2EAD33"/>
+            <a:srgbClr val="43B7DC"/>
           </a:solidFill>
           <a:ln>
             <a:noFill/>
@@ -9659,8 +9913,8 @@
         </p:nvSpPr>
         <p:spPr>
           <a:xfrm>
-            <a:off x="566928" y="1664208"/>
-            <a:ext cx="5277459" cy="3246120"/>
+            <a:off x="566928" y="1536192"/>
+            <a:ext cx="5277459" cy="3108960"/>
           </a:xfrm>
           <a:prstGeom prst="roundRect">
             <a:avLst>
@@ -9707,8 +9961,8 @@
         </p:nvSpPr>
         <p:spPr>
           <a:xfrm>
-            <a:off x="822960" y="1828800"/>
-            <a:ext cx="4765395" cy="2926080"/>
+            <a:off x="822960" y="1719072"/>
+            <a:ext cx="4765395" cy="2834640"/>
           </a:xfrm>
           <a:prstGeom prst="rect">
             <a:avLst/>
@@ -9726,13 +9980,13 @@
                 <a:spcPts val="0"/>
               </a:spcBef>
               <a:spcAft>
-                <a:spcPts val="1000"/>
-              </a:spcAft>
-            </a:pPr>
-            <a:r>
-              <a:rPr sz="1450" b="0">
-                <a:solidFill>
-                  <a:srgbClr val="1E7A22"/>
+                <a:spcPts val="1600"/>
+              </a:spcAft>
+            </a:pPr>
+            <a:r>
+              <a:rPr sz="1550" b="0">
+                <a:solidFill>
+                  <a:srgbClr val="1C7896"/>
                 </a:solidFill>
                 <a:latin typeface="Segoe UI"/>
               </a:rPr>
@@ -9740,108 +9994,117 @@
             </a:r>
           </a:p>
           <a:p>
-            <a:pPr marL="237744" indent="-237744">
-              <a:spcAft>
-                <a:spcPts val="800"/>
+            <a:pPr marL="310896" indent="-310896">
+              <a:spcBef>
+                <a:spcPts val="0"/>
+              </a:spcBef>
+              <a:spcAft>
+                <a:spcPts val="1500"/>
               </a:spcAft>
               <a:buNone/>
             </a:pPr>
             <a:r>
-              <a:rPr sz="1250" b="1">
-                <a:solidFill>
-                  <a:srgbClr val="2EAD33"/>
+              <a:rPr sz="1600" b="1">
+                <a:solidFill>
+                  <a:srgbClr val="1C7896"/>
                 </a:solidFill>
                 <a:latin typeface="Segoe UI"/>
               </a:rPr>
               <a:t>▪   </a:t>
             </a:r>
             <a:r>
-              <a:rPr sz="1250" b="1">
+              <a:rPr sz="1600" b="1">
+                <a:solidFill>
+                  <a:srgbClr val="1C7896"/>
+                </a:solidFill>
+                <a:latin typeface="Segoe UI"/>
+              </a:rPr>
+              <a:t>this.loc(css)</a:t>
+            </a:r>
+            <a:r>
+              <a:rPr sz="1600">
                 <a:solidFill>
                   <a:srgbClr val="212630"/>
                 </a:solidFill>
                 <a:latin typeface="Segoe UI"/>
               </a:rPr>
-              <a:t>this.loc(selector)</a:t>
-            </a:r>
-            <a:r>
-              <a:rPr sz="1250">
-                <a:solidFill>
-                  <a:srgbClr val="626B7A"/>
-                </a:solidFill>
-                <a:latin typeface="Segoe UI"/>
-              </a:rPr>
-              <a:t> — a raw CSS string: narrow the selector that broke.</a:t>
-            </a:r>
-          </a:p>
-          <a:p>
-            <a:pPr marL="237744" indent="-237744">
-              <a:spcAft>
-                <a:spcPts val="800"/>
+              <a:t> narrow the selector that broke.</a:t>
+            </a:r>
+          </a:p>
+          <a:p>
+            <a:pPr marL="310896" indent="-310896">
+              <a:spcBef>
+                <a:spcPts val="0"/>
+              </a:spcBef>
+              <a:spcAft>
+                <a:spcPts val="1500"/>
               </a:spcAft>
               <a:buNone/>
             </a:pPr>
             <a:r>
-              <a:rPr sz="1250" b="1">
-                <a:solidFill>
-                  <a:srgbClr val="2EAD33"/>
+              <a:rPr sz="1600" b="1">
+                <a:solidFill>
+                  <a:srgbClr val="1C7896"/>
                 </a:solidFill>
                 <a:latin typeface="Segoe UI"/>
               </a:rPr>
               <a:t>▪   </a:t>
             </a:r>
             <a:r>
-              <a:rPr sz="1250" b="1">
+              <a:rPr sz="1600" b="1">
+                <a:solidFill>
+                  <a:srgbClr val="1C7896"/>
+                </a:solidFill>
+                <a:latin typeface="Segoe UI"/>
+              </a:rPr>
+              <a:t>this.byCopy(text)</a:t>
+            </a:r>
+            <a:r>
+              <a:rPr sz="1600">
                 <a:solidFill>
                   <a:srgbClr val="212630"/>
                 </a:solidFill>
                 <a:latin typeface="Segoe UI"/>
               </a:rPr>
-              <a:t>this.byCopy(text, build)</a:t>
-            </a:r>
-            <a:r>
-              <a:rPr sz="1250">
-                <a:solidFill>
-                  <a:srgbClr val="626B7A"/>
-                </a:solidFill>
-                <a:latin typeface="Segoe UI"/>
-              </a:rPr>
-              <a:t> — an element identified by its copy: take the nearest on-page text, only when it is uniquely nearest and above a high similarity floor.</a:t>
-            </a:r>
-          </a:p>
-          <a:p>
-            <a:pPr marL="237744" indent="-237744">
-              <a:spcAft>
-                <a:spcPts val="800"/>
+              <a:t> the nearest on-page copy, uniquely.</a:t>
+            </a:r>
+          </a:p>
+          <a:p>
+            <a:pPr marL="310896" indent="-310896">
+              <a:spcBef>
+                <a:spcPts val="0"/>
+              </a:spcBef>
+              <a:spcAft>
+                <a:spcPts val="1500"/>
               </a:spcAft>
               <a:buNone/>
             </a:pPr>
             <a:r>
-              <a:rPr sz="1250" b="1">
-                <a:solidFill>
-                  <a:srgbClr val="2EAD33"/>
+              <a:rPr sz="1600" b="1">
+                <a:solidFill>
+                  <a:srgbClr val="1C7896"/>
                 </a:solidFill>
                 <a:latin typeface="Segoe UI"/>
               </a:rPr>
               <a:t>▪   </a:t>
             </a:r>
             <a:r>
-              <a:rPr sz="1250" b="1">
+              <a:rPr sz="1600" b="1">
+                <a:solidFill>
+                  <a:srgbClr val="1C7896"/>
+                </a:solidFill>
+                <a:latin typeface="Segoe UI"/>
+              </a:rPr>
+              <a:t>No model in the path.</a:t>
+            </a:r>
+            <a:r>
+              <a:rPr sz="1600">
                 <a:solidFill>
                   <a:srgbClr val="212630"/>
                 </a:solidFill>
                 <a:latin typeface="Segoe UI"/>
               </a:rPr>
-              <a:t>No model in this path.</a:t>
-            </a:r>
-            <a:r>
-              <a:rPr sz="1250">
-                <a:solidFill>
-                  <a:srgbClr val="626B7A"/>
-                </a:solidFill>
-                <a:latin typeface="Segoe UI"/>
-              </a:rPr>
-              <a:t> A CSS candidate is a mechanical narrowing; a copy candidate is a distance. Two near-identical candidates are a coin toss, so neither is taken — a wrong locator that matches the wrong element passes, which is worse than the honest failure it replaced.</a:t>
+              <a:t> A wrong guess passes on the wrong element.</a:t>
             </a:r>
           </a:p>
         </p:txBody>
@@ -9854,8 +10117,8 @@
         </p:nvSpPr>
         <p:spPr>
           <a:xfrm>
-            <a:off x="6347307" y="1664208"/>
-            <a:ext cx="5277459" cy="3246120"/>
+            <a:off x="6347307" y="1536192"/>
+            <a:ext cx="5277459" cy="3108960"/>
           </a:xfrm>
           <a:prstGeom prst="roundRect">
             <a:avLst>
@@ -9902,8 +10165,8 @@
         </p:nvSpPr>
         <p:spPr>
           <a:xfrm>
-            <a:off x="6603339" y="1828800"/>
-            <a:ext cx="4765395" cy="2926080"/>
+            <a:off x="6603339" y="1719072"/>
+            <a:ext cx="4765395" cy="2834640"/>
           </a:xfrm>
           <a:prstGeom prst="rect">
             <a:avLst/>
@@ -9921,11 +10184,11 @@
                 <a:spcPts val="0"/>
               </a:spcBef>
               <a:spcAft>
-                <a:spcPts val="1000"/>
-              </a:spcAft>
-            </a:pPr>
-            <a:r>
-              <a:rPr sz="1450" b="0">
+                <a:spcPts val="1600"/>
+              </a:spcAft>
+            </a:pPr>
+            <a:r>
+              <a:rPr sz="1550" b="0">
                 <a:solidFill>
                   <a:srgbClr val="B46A00"/>
                 </a:solidFill>
@@ -9935,14 +10198,17 @@
             </a:r>
           </a:p>
           <a:p>
-            <a:pPr marL="237744" indent="-237744">
-              <a:spcAft>
-                <a:spcPts val="800"/>
+            <a:pPr marL="310896" indent="-310896">
+              <a:spcBef>
+                <a:spcPts val="0"/>
+              </a:spcBef>
+              <a:spcAft>
+                <a:spcPts val="1500"/>
               </a:spcAft>
               <a:buNone/>
             </a:pPr>
             <a:r>
-              <a:rPr sz="1250" b="1">
+              <a:rPr sz="1600" b="1">
                 <a:solidFill>
                   <a:srgbClr val="B46A00"/>
                 </a:solidFill>
@@ -9951,33 +10217,36 @@
               <a:t>▪   </a:t>
             </a:r>
             <a:r>
-              <a:rPr sz="1250" b="1">
+              <a:rPr sz="1600" b="1">
+                <a:solidFill>
+                  <a:srgbClr val="B46A00"/>
+                </a:solidFill>
+                <a:latin typeface="Segoe UI"/>
+              </a:rPr>
+              <a:t>The feature is gone.</a:t>
+            </a:r>
+            <a:r>
+              <a:rPr sz="1600">
                 <a:solidFill>
                   <a:srgbClr val="212630"/>
                 </a:solidFill>
                 <a:latin typeface="Segoe UI"/>
               </a:rPr>
-              <a:t>The feature is genuinely gone.</a:t>
-            </a:r>
-            <a:r>
-              <a:rPr sz="1250">
-                <a:solidFill>
-                  <a:srgbClr val="626B7A"/>
-                </a:solidFill>
-                <a:latin typeface="Segoe UI"/>
-              </a:rPr>
               <a:t> A real failure, for a human.</a:t>
             </a:r>
           </a:p>
           <a:p>
-            <a:pPr marL="237744" indent="-237744">
-              <a:spcAft>
-                <a:spcPts val="800"/>
+            <a:pPr marL="310896" indent="-310896">
+              <a:spcBef>
+                <a:spcPts val="0"/>
+              </a:spcBef>
+              <a:spcAft>
+                <a:spcPts val="1500"/>
               </a:spcAft>
               <a:buNone/>
             </a:pPr>
             <a:r>
-              <a:rPr sz="1250" b="1">
+              <a:rPr sz="1600" b="1">
                 <a:solidFill>
                   <a:srgbClr val="B46A00"/>
                 </a:solidFill>
@@ -9986,33 +10255,36 @@
               <a:t>▪   </a:t>
             </a:r>
             <a:r>
-              <a:rPr sz="1250" b="1">
+              <a:rPr sz="1600" b="1">
+                <a:solidFill>
+                  <a:srgbClr val="B46A00"/>
+                </a:solidFill>
+                <a:latin typeface="Segoe UI"/>
+              </a:rPr>
+              <a:t>A timing failure.</a:t>
+            </a:r>
+            <a:r>
+              <a:rPr sz="1600">
                 <a:solidFill>
                   <a:srgbClr val="212630"/>
                 </a:solidFill>
                 <a:latin typeface="Segoe UI"/>
               </a:rPr>
-              <a:t>A timing or state failure.</a:t>
-            </a:r>
-            <a:r>
-              <a:rPr sz="1250">
-                <a:solidFill>
-                  <a:srgbClr val="626B7A"/>
-                </a:solidFill>
-                <a:latin typeface="Segoe UI"/>
-              </a:rPr>
               <a:t> A test bug, not a locator bug.</a:t>
             </a:r>
           </a:p>
           <a:p>
-            <a:pPr marL="237744" indent="-237744">
-              <a:spcAft>
-                <a:spcPts val="800"/>
+            <a:pPr marL="310896" indent="-310896">
+              <a:spcBef>
+                <a:spcPts val="0"/>
+              </a:spcBef>
+              <a:spcAft>
+                <a:spcPts val="1500"/>
               </a:spcAft>
               <a:buNone/>
             </a:pPr>
             <a:r>
-              <a:rPr sz="1250" b="1">
+              <a:rPr sz="1600" b="1">
                 <a:solidFill>
                   <a:srgbClr val="B46A00"/>
                 </a:solidFill>
@@ -10021,33 +10293,36 @@
               <a:t>▪   </a:t>
             </a:r>
             <a:r>
-              <a:rPr sz="1250" b="1">
+              <a:rPr sz="1600" b="1">
+                <a:solidFill>
+                  <a:srgbClr val="B46A00"/>
+                </a:solidFill>
+                <a:latin typeface="Segoe UI"/>
+              </a:rPr>
+              <a:t>The wrong locale.</a:t>
+            </a:r>
+            <a:r>
+              <a:rPr sz="1600">
                 <a:solidFill>
                   <a:srgbClr val="212630"/>
                 </a:solidFill>
                 <a:latin typeface="Segoe UI"/>
               </a:rPr>
-              <a:t>The copy belongs to another locale.</a:t>
-            </a:r>
-            <a:r>
-              <a:rPr sz="1250">
-                <a:solidFill>
-                  <a:srgbClr val="626B7A"/>
-                </a:solidFill>
-                <a:latin typeface="Segoe UI"/>
-              </a:rPr>
-              <a:t> /en “Portfolio” vs /id “Portofolio” is 0.90 similar — unguarded, one run against /id would rewrite the English copy and break /en.</a:t>
-            </a:r>
-          </a:p>
-          <a:p>
-            <a:pPr marL="237744" indent="-237744">
-              <a:spcAft>
-                <a:spcPts val="800"/>
+              <a:t> /id “Portofolio” is 0.90 like /en “Portfolio”.</a:t>
+            </a:r>
+          </a:p>
+          <a:p>
+            <a:pPr marL="310896" indent="-310896">
+              <a:spcBef>
+                <a:spcPts val="0"/>
+              </a:spcBef>
+              <a:spcAft>
+                <a:spcPts val="1500"/>
               </a:spcAft>
               <a:buNone/>
             </a:pPr>
             <a:r>
-              <a:rPr sz="1250" b="1">
+              <a:rPr sz="1600" b="1">
                 <a:solidFill>
                   <a:srgbClr val="B46A00"/>
                 </a:solidFill>
@@ -10056,18 +10331,18 @@
               <a:t>▪   </a:t>
             </a:r>
             <a:r>
-              <a:rPr sz="1250" b="1">
+              <a:rPr sz="1600" b="1">
+                <a:solidFill>
+                  <a:srgbClr val="B46A00"/>
+                </a:solidFill>
+                <a:latin typeface="Segoe UI"/>
+              </a:rPr>
+              <a:t>Named reasons.</a:t>
+            </a:r>
+            <a:r>
+              <a:rPr sz="1600">
                 <a:solidFill>
                   <a:srgbClr val="212630"/>
-                </a:solidFill>
-                <a:latin typeface="Segoe UI"/>
-              </a:rPr>
-              <a:t>Every refusal is recorded with a named reason.</a:t>
-            </a:r>
-            <a:r>
-              <a:rPr sz="1250">
-                <a:solidFill>
-                  <a:srgbClr val="626B7A"/>
                 </a:solidFill>
                 <a:latin typeface="Segoe UI"/>
               </a:rPr>
@@ -10084,8 +10359,8 @@
         </p:nvSpPr>
         <p:spPr>
           <a:xfrm>
-            <a:off x="566928" y="5029200"/>
-            <a:ext cx="11057839" cy="658368"/>
+            <a:off x="566928" y="4846320"/>
+            <a:ext cx="11057839" cy="603504"/>
           </a:xfrm>
           <a:prstGeom prst="roundRect">
             <a:avLst>
@@ -10130,8 +10405,8 @@
         </p:nvSpPr>
         <p:spPr>
           <a:xfrm>
-            <a:off x="768096" y="5193792"/>
-            <a:ext cx="10655503" cy="329184"/>
+            <a:off x="768096" y="4992624"/>
+            <a:ext cx="10655503" cy="310896"/>
           </a:xfrm>
           <a:prstGeom prst="rect">
             <a:avLst/>
@@ -10152,11 +10427,11 @@
                 <a:spcPts val="0"/>
               </a:spcBef>
               <a:spcAft>
-                <a:spcPts val="350"/>
-              </a:spcAft>
-            </a:pPr>
-            <a:r>
-              <a:rPr sz="1150" b="0">
+                <a:spcPts val="400"/>
+              </a:spcAft>
+            </a:pPr>
+            <a:r>
+              <a:rPr sz="1200" b="0">
                 <a:solidFill>
                   <a:srgbClr val="E7EAF0"/>
                 </a:solidFill>
@@ -10175,8 +10450,8 @@
         </p:nvSpPr>
         <p:spPr>
           <a:xfrm>
-            <a:off x="566928" y="5852160"/>
-            <a:ext cx="11057839" cy="603504"/>
+            <a:off x="566928" y="5596128"/>
+            <a:ext cx="11057839" cy="694944"/>
           </a:xfrm>
           <a:prstGeom prst="roundRect">
             <a:avLst>
@@ -10221,14 +10496,14 @@
         </p:nvSpPr>
         <p:spPr>
           <a:xfrm>
-            <a:off x="566928" y="5852160"/>
-            <a:ext cx="68580" cy="603504"/>
+            <a:off x="566928" y="5596128"/>
+            <a:ext cx="64008" cy="694944"/>
           </a:xfrm>
           <a:prstGeom prst="rect">
             <a:avLst/>
           </a:prstGeom>
           <a:solidFill>
-            <a:srgbClr val="2EAD33"/>
+            <a:srgbClr val="43B7DC"/>
           </a:solidFill>
           <a:ln>
             <a:noFill/>
@@ -10265,8 +10540,8 @@
         </p:nvSpPr>
         <p:spPr>
           <a:xfrm>
-            <a:off x="822960" y="5902452"/>
-            <a:ext cx="10600639" cy="502920"/>
+            <a:off x="804672" y="5641848"/>
+            <a:ext cx="10637215" cy="603504"/>
           </a:xfrm>
           <a:prstGeom prst="rect">
             <a:avLst/>
@@ -10281,7 +10556,7 @@
           <a:p>
             <a:pPr algn="l">
               <a:lnSpc>
-                <a:spcPct val="115000"/>
+                <a:spcPct val="112000"/>
               </a:lnSpc>
               <a:spcBef>
                 <a:spcPts val="0"/>
@@ -10291,7 +10566,7 @@
               </a:spcAft>
             </a:pPr>
             <a:r>
-              <a:rPr sz="1350" b="1">
+              <a:rPr sz="1600" b="1">
                 <a:solidFill>
                   <a:srgbClr val="212630"/>
                 </a:solidFill>
@@ -10300,13 +10575,13 @@
               <a:t>A heal is only as good as the test that used it. </a:t>
             </a:r>
             <a:r>
-              <a:rPr sz="1350" b="0">
+              <a:rPr sz="1600" b="0">
                 <a:solidFill>
                   <a:srgbClr val="626B7A"/>
                 </a:solidFill>
                 <a:latin typeface="Segoe UI"/>
               </a:rPr>
-              <a:t>Only a repair whose test PASSED is written into the source; a repair whose test failed is declined and named. Otherwise a failing test disappears and a wrong locator gets committed.</a:t>
+              <a:t>Only a repair whose test passed is written into the source; a failed one is declined and named.</a:t>
             </a:r>
           </a:p>
         </p:txBody>
@@ -10319,8 +10594,8 @@
         </p:nvSpPr>
         <p:spPr>
           <a:xfrm>
-            <a:off x="566928" y="6382512"/>
-            <a:ext cx="11057839" cy="274320"/>
+            <a:off x="566928" y="6419088"/>
+            <a:ext cx="11057839" cy="256032"/>
           </a:xfrm>
           <a:prstGeom prst="rect">
             <a:avLst/>
@@ -10388,7 +10663,7 @@
         </p:nvSpPr>
         <p:spPr>
           <a:xfrm>
-            <a:off x="566928" y="384048"/>
+            <a:off x="566928" y="365760"/>
             <a:ext cx="11057839" cy="658368"/>
           </a:xfrm>
           <a:prstGeom prst="rect">
@@ -10411,7 +10686,7 @@
               </a:spcAft>
             </a:pPr>
             <a:r>
-              <a:rPr sz="2900" b="0">
+              <a:rPr sz="2700" b="0">
                 <a:solidFill>
                   <a:srgbClr val="171B23"/>
                 </a:solidFill>
@@ -10430,9 +10705,9 @@
               </a:spcAft>
             </a:pPr>
             <a:r>
-              <a:rPr sz="1250" b="0">
-                <a:solidFill>
-                  <a:srgbClr val="1E7A22"/>
+              <a:rPr sz="1150" b="0">
+                <a:solidFill>
+                  <a:srgbClr val="9AA2AE"/>
                 </a:solidFill>
                 <a:latin typeface="Segoe UI"/>
               </a:rPr>
@@ -10449,8 +10724,8 @@
         </p:nvSpPr>
         <p:spPr>
           <a:xfrm>
-            <a:off x="566928" y="1060704"/>
-            <a:ext cx="1051560" cy="50292"/>
+            <a:off x="566928" y="1042415"/>
+            <a:ext cx="777240" cy="41148"/>
           </a:xfrm>
           <a:prstGeom prst="roundRect">
             <a:avLst>
@@ -10458,7 +10733,7 @@
             </a:avLst>
           </a:prstGeom>
           <a:solidFill>
-            <a:srgbClr val="2EAD33"/>
+            <a:srgbClr val="43B7DC"/>
           </a:solidFill>
           <a:ln>
             <a:noFill/>
@@ -10496,8 +10771,8 @@
           <p:nvPr/>
         </p:nvGraphicFramePr>
         <p:xfrm>
-          <a:off x="566928" y="1572768"/>
-          <a:ext cx="11055096" cy="4178808"/>
+          <a:off x="566928" y="1481328"/>
+          <a:ext cx="11055096" cy="3803904"/>
         </p:xfrm>
         <a:graphic>
           <a:graphicData uri="http://schemas.openxmlformats.org/drawingml/2006/table">
@@ -10506,11 +10781,11 @@
                 <a:tableStyleId>{2D5ABB26-0587-4C30-8999-92F81FD0307C}</a:tableStyleId>
               </a:tblPr>
               <a:tblGrid>
-                <a:gridCol w="3063240"/>
-                <a:gridCol w="5303520"/>
+                <a:gridCol w="3017520"/>
+                <a:gridCol w="5349240"/>
                 <a:gridCol w="2688336"/>
               </a:tblGrid>
-              <a:tr h="384048">
+              <a:tr h="402336">
                 <a:tc>
                   <a:txBody>
                     <a:bodyPr wrap="square"/>
@@ -10518,7 +10793,7 @@
                     <a:p>
                       <a:pPr algn="l">
                         <a:lnSpc>
-                          <a:spcPct val="105000"/>
+                          <a:spcPct val="104000"/>
                         </a:lnSpc>
                         <a:spcBef>
                           <a:spcPts val="0"/>
@@ -10528,7 +10803,7 @@
                         </a:spcAft>
                       </a:pPr>
                       <a:r>
-                        <a:rPr sz="1150" b="1">
+                        <a:rPr sz="1200" b="1">
                           <a:solidFill>
                             <a:srgbClr val="FFFFFF"/>
                           </a:solidFill>
@@ -10538,7 +10813,7 @@
                       </a:r>
                     </a:p>
                   </a:txBody>
-                  <a:tcPr marL="118872" marR="91440" marT="45720" marB="45720" anchor="ctr">
+                  <a:tcPr marL="128016" marR="91440" marT="36576" marB="36576" anchor="ctr">
                     <a:solidFill>
                       <a:srgbClr val="171B23"/>
                     </a:solidFill>
@@ -10551,7 +10826,7 @@
                     <a:p>
                       <a:pPr algn="l">
                         <a:lnSpc>
-                          <a:spcPct val="105000"/>
+                          <a:spcPct val="104000"/>
                         </a:lnSpc>
                         <a:spcBef>
                           <a:spcPts val="0"/>
@@ -10561,7 +10836,7 @@
                         </a:spcAft>
                       </a:pPr>
                       <a:r>
-                        <a:rPr sz="1150" b="1">
+                        <a:rPr sz="1200" b="1">
                           <a:solidFill>
                             <a:srgbClr val="FFFFFF"/>
                           </a:solidFill>
@@ -10571,7 +10846,7 @@
                       </a:r>
                     </a:p>
                   </a:txBody>
-                  <a:tcPr marL="118872" marR="91440" marT="45720" marB="45720" anchor="ctr">
+                  <a:tcPr marL="128016" marR="91440" marT="36576" marB="36576" anchor="ctr">
                     <a:solidFill>
                       <a:srgbClr val="171B23"/>
                     </a:solidFill>
@@ -10584,7 +10859,7 @@
                     <a:p>
                       <a:pPr algn="l">
                         <a:lnSpc>
-                          <a:spcPct val="105000"/>
+                          <a:spcPct val="104000"/>
                         </a:lnSpc>
                         <a:spcBef>
                           <a:spcPts val="0"/>
@@ -10594,7 +10869,7 @@
                         </a:spcAft>
                       </a:pPr>
                       <a:r>
-                        <a:rPr sz="1150" b="1">
+                        <a:rPr sz="1200" b="1">
                           <a:solidFill>
                             <a:srgbClr val="FFFFFF"/>
                           </a:solidFill>
@@ -10604,14 +10879,14 @@
                       </a:r>
                     </a:p>
                   </a:txBody>
-                  <a:tcPr marL="118872" marR="91440" marT="45720" marB="45720" anchor="ctr">
+                  <a:tcPr marL="128016" marR="91440" marT="36576" marB="36576" anchor="ctr">
                     <a:solidFill>
                       <a:srgbClr val="171B23"/>
                     </a:solidFill>
                   </a:tcPr>
                 </a:tc>
               </a:tr>
-              <a:tr h="758952">
+              <a:tr h="566928">
                 <a:tc>
                   <a:txBody>
                     <a:bodyPr wrap="square"/>
@@ -10619,7 +10894,7 @@
                     <a:p>
                       <a:pPr algn="l">
                         <a:lnSpc>
-                          <a:spcPct val="105000"/>
+                          <a:spcPct val="104000"/>
                         </a:lnSpc>
                         <a:spcBef>
                           <a:spcPts val="0"/>
@@ -10629,17 +10904,17 @@
                         </a:spcAft>
                       </a:pPr>
                       <a:r>
-                        <a:rPr sz="1100" b="0">
+                        <a:rPr sz="1150" b="0">
                           <a:solidFill>
                             <a:srgbClr val="212630"/>
                           </a:solidFill>
                           <a:latin typeface="Segoe UI"/>
                         </a:rPr>
-                        <a:t>Test passed — no visual error</a:t>
+                        <a:t>Test passed, no visual error</a:t>
                       </a:r>
                     </a:p>
                   </a:txBody>
-                  <a:tcPr marL="118872" marR="91440" marT="45720" marB="45720" anchor="ctr">
+                  <a:tcPr marL="128016" marR="91440" marT="36576" marB="36576" anchor="ctr">
                     <a:solidFill>
                       <a:srgbClr val="FFFFFF"/>
                     </a:solidFill>
@@ -10652,7 +10927,7 @@
                     <a:p>
                       <a:pPr algn="l">
                         <a:lnSpc>
-                          <a:spcPct val="105000"/>
+                          <a:spcPct val="104000"/>
                         </a:lnSpc>
                         <a:spcBef>
                           <a:spcPts val="0"/>
@@ -10662,17 +10937,17 @@
                         </a:spcAft>
                       </a:pPr>
                       <a:r>
-                        <a:rPr sz="1100" b="0">
+                        <a:rPr sz="1150" b="0">
                           <a:solidFill>
                             <a:srgbClr val="212630"/>
                           </a:solidFill>
                           <a:latin typeface="Segoe UI"/>
                         </a:rPr>
-                        <a:t>The check was blind: a 300px widget in a 276px form column spilled 24px, while the document's scroll width never changed.</a:t>
+                        <a:t>A 300px widget in a 276px column spilled 24px; the document never widened.</a:t>
                       </a:r>
                     </a:p>
                   </a:txBody>
-                  <a:tcPr marL="118872" marR="91440" marT="45720" marB="45720" anchor="ctr">
+                  <a:tcPr marL="128016" marR="91440" marT="36576" marB="36576" anchor="ctr">
                     <a:solidFill>
                       <a:srgbClr val="FFFFFF"/>
                     </a:solidFill>
@@ -10685,7 +10960,7 @@
                     <a:p>
                       <a:pPr algn="l">
                         <a:lnSpc>
-                          <a:spcPct val="105000"/>
+                          <a:spcPct val="104000"/>
                         </a:lnSpc>
                         <a:spcBef>
                           <a:spcPts val="0"/>
@@ -10695,24 +10970,24 @@
                         </a:spcAft>
                       </a:pPr>
                       <a:r>
-                        <a:rPr sz="1100" b="0">
+                        <a:rPr sz="1150" b="0">
                           <a:solidFill>
                             <a:srgbClr val="212630"/>
                           </a:solidFill>
                           <a:latin typeface="Segoe UI"/>
                         </a:rPr>
-                        <a:t>Measuring elements, not just the document</a:t>
+                        <a:t>Measuring elements, not the document</a:t>
                       </a:r>
                     </a:p>
                   </a:txBody>
-                  <a:tcPr marL="118872" marR="91440" marT="45720" marB="45720" anchor="ctr">
+                  <a:tcPr marL="128016" marR="91440" marT="36576" marB="36576" anchor="ctr">
                     <a:solidFill>
                       <a:srgbClr val="FFFFFF"/>
                     </a:solidFill>
                   </a:tcPr>
                 </a:tc>
               </a:tr>
-              <a:tr h="758952">
+              <a:tr h="566928">
                 <a:tc>
                   <a:txBody>
                     <a:bodyPr wrap="square"/>
@@ -10720,7 +10995,7 @@
                     <a:p>
                       <a:pPr algn="l">
                         <a:lnSpc>
-                          <a:spcPct val="105000"/>
+                          <a:spcPct val="104000"/>
                         </a:lnSpc>
                         <a:spcBef>
                           <a:spcPts val="0"/>
@@ -10730,7 +11005,7 @@
                         </a:spcAft>
                       </a:pPr>
                       <a:r>
-                        <a:rPr sz="1100" b="0">
+                        <a:rPr sz="1150" b="0">
                           <a:solidFill>
                             <a:srgbClr val="212630"/>
                           </a:solidFill>
@@ -10740,7 +11015,7 @@
                       </a:r>
                     </a:p>
                   </a:txBody>
-                  <a:tcPr marL="118872" marR="91440" marT="45720" marB="45720" anchor="ctr">
+                  <a:tcPr marL="128016" marR="91440" marT="36576" marB="36576" anchor="ctr">
                     <a:solidFill>
                       <a:srgbClr val="F3F5F8"/>
                     </a:solidFill>
@@ -10753,7 +11028,7 @@
                     <a:p>
                       <a:pPr algn="l">
                         <a:lnSpc>
-                          <a:spcPct val="105000"/>
+                          <a:spcPct val="104000"/>
                         </a:lnSpc>
                         <a:spcBef>
                           <a:spcPts val="0"/>
@@ -10763,17 +11038,17 @@
                         </a:spcAft>
                       </a:pPr>
                       <a:r>
-                        <a:rPr sz="1100" b="0">
+                        <a:rPr sz="1150" b="0">
                           <a:solidFill>
                             <a:srgbClr val="212630"/>
                           </a:solidFill>
                           <a:latin typeface="Segoe UI"/>
                         </a:rPr>
-                        <a:t>A stale test vouched for itself: the classifier was asked with the old block's own title in the evidence list, so an edited scenario never reached the spec.</a:t>
+                        <a:t>A stale block vouched for itself with its own title.</a:t>
                       </a:r>
                     </a:p>
                   </a:txBody>
-                  <a:tcPr marL="118872" marR="91440" marT="45720" marB="45720" anchor="ctr">
+                  <a:tcPr marL="128016" marR="91440" marT="36576" marB="36576" anchor="ctr">
                     <a:solidFill>
                       <a:srgbClr val="F3F5F8"/>
                     </a:solidFill>
@@ -10786,7 +11061,7 @@
                     <a:p>
                       <a:pPr algn="l">
                         <a:lnSpc>
-                          <a:spcPct val="105000"/>
+                          <a:spcPct val="104000"/>
                         </a:lnSpc>
                         <a:spcBef>
                           <a:spcPts val="0"/>
@@ -10796,7 +11071,7 @@
                         </a:spcAft>
                       </a:pPr>
                       <a:r>
-                        <a:rPr sz="1100" b="0">
+                        <a:rPr sz="1150" b="0">
                           <a:solidFill>
                             <a:srgbClr val="212630"/>
                           </a:solidFill>
@@ -10806,14 +11081,14 @@
                       </a:r>
                     </a:p>
                   </a:txBody>
-                  <a:tcPr marL="118872" marR="91440" marT="45720" marB="45720" anchor="ctr">
+                  <a:tcPr marL="128016" marR="91440" marT="36576" marB="36576" anchor="ctr">
                     <a:solidFill>
                       <a:srgbClr val="F3F5F8"/>
                     </a:solidFill>
                   </a:tcPr>
                 </a:tc>
               </a:tr>
-              <a:tr h="758952">
+              <a:tr h="566928">
                 <a:tc>
                   <a:txBody>
                     <a:bodyPr wrap="square"/>
@@ -10821,7 +11096,7 @@
                     <a:p>
                       <a:pPr algn="l">
                         <a:lnSpc>
-                          <a:spcPct val="105000"/>
+                          <a:spcPct val="104000"/>
                         </a:lnSpc>
                         <a:spcBef>
                           <a:spcPts val="0"/>
@@ -10831,7 +11106,7 @@
                         </a:spcAft>
                       </a:pPr>
                       <a:r>
-                        <a:rPr sz="1100" b="0">
+                        <a:rPr sz="1150" b="0">
                           <a:solidFill>
                             <a:srgbClr val="212630"/>
                           </a:solidFill>
@@ -10841,7 +11116,7 @@
                       </a:r>
                     </a:p>
                   </a:txBody>
-                  <a:tcPr marL="118872" marR="91440" marT="45720" marB="45720" anchor="ctr">
+                  <a:tcPr marL="128016" marR="91440" marT="36576" marB="36576" anchor="ctr">
                     <a:solidFill>
                       <a:srgbClr val="FFFFFF"/>
                     </a:solidFill>
@@ -10854,7 +11129,7 @@
                     <a:p>
                       <a:pPr algn="l">
                         <a:lnSpc>
-                          <a:spcPct val="105000"/>
+                          <a:spcPct val="104000"/>
                         </a:lnSpc>
                         <a:spcBef>
                           <a:spcPts val="0"/>
@@ -10864,17 +11139,17 @@
                         </a:spcAft>
                       </a:pPr>
                       <a:r>
-                        <a:rPr sz="1100" b="0">
+                        <a:rPr sz="1150" b="0">
                           <a:solidFill>
                             <a:srgbClr val="212630"/>
                           </a:solidFill>
                           <a:latin typeface="Segoe UI"/>
                         </a:rPr>
-                        <a:t>The repair pointed at the neighbouring element and the assertion then failed. Folding it in would commit a wrong locator and delete the failure.</a:t>
+                        <a:t>The repair pointed at the neighbour, and the assertion then failed.</a:t>
                       </a:r>
                     </a:p>
                   </a:txBody>
-                  <a:tcPr marL="118872" marR="91440" marT="45720" marB="45720" anchor="ctr">
+                  <a:tcPr marL="128016" marR="91440" marT="36576" marB="36576" anchor="ctr">
                     <a:solidFill>
                       <a:srgbClr val="FFFFFF"/>
                     </a:solidFill>
@@ -10887,7 +11162,7 @@
                     <a:p>
                       <a:pPr algn="l">
                         <a:lnSpc>
-                          <a:spcPct val="105000"/>
+                          <a:spcPct val="104000"/>
                         </a:lnSpc>
                         <a:spcBef>
                           <a:spcPts val="0"/>
@@ -10897,7 +11172,7 @@
                         </a:spcAft>
                       </a:pPr>
                       <a:r>
-                        <a:rPr sz="1100" b="0">
+                        <a:rPr sz="1150" b="0">
                           <a:solidFill>
                             <a:srgbClr val="212630"/>
                           </a:solidFill>
@@ -10907,14 +11182,14 @@
                       </a:r>
                     </a:p>
                   </a:txBody>
-                  <a:tcPr marL="118872" marR="91440" marT="45720" marB="45720" anchor="ctr">
+                  <a:tcPr marL="128016" marR="91440" marT="36576" marB="36576" anchor="ctr">
                     <a:solidFill>
                       <a:srgbClr val="FFFFFF"/>
                     </a:solidFill>
                   </a:tcPr>
                 </a:tc>
               </a:tr>
-              <a:tr h="758952">
+              <a:tr h="566928">
                 <a:tc>
                   <a:txBody>
                     <a:bodyPr wrap="square"/>
@@ -10922,7 +11197,7 @@
                     <a:p>
                       <a:pPr algn="l">
                         <a:lnSpc>
-                          <a:spcPct val="105000"/>
+                          <a:spcPct val="104000"/>
                         </a:lnSpc>
                         <a:spcBef>
                           <a:spcPts val="0"/>
@@ -10932,7 +11207,7 @@
                         </a:spcAft>
                       </a:pPr>
                       <a:r>
-                        <a:rPr sz="1100" b="0">
+                        <a:rPr sz="1150" b="0">
                           <a:solidFill>
                             <a:srgbClr val="212630"/>
                           </a:solidFill>
@@ -10942,7 +11217,7 @@
                       </a:r>
                     </a:p>
                   </a:txBody>
-                  <a:tcPr marL="118872" marR="91440" marT="45720" marB="45720" anchor="ctr">
+                  <a:tcPr marL="128016" marR="91440" marT="36576" marB="36576" anchor="ctr">
                     <a:solidFill>
                       <a:srgbClr val="F3F5F8"/>
                     </a:solidFill>
@@ -10955,7 +11230,7 @@
                     <a:p>
                       <a:pPr algn="l">
                         <a:lnSpc>
-                          <a:spcPct val="105000"/>
+                          <a:spcPct val="104000"/>
                         </a:lnSpc>
                         <a:spcBef>
                           <a:spcPts val="0"/>
@@ -10965,7 +11240,7 @@
                         </a:spcAft>
                       </a:pPr>
                       <a:r>
-                        <a:rPr sz="1100" b="0">
+                        <a:rPr sz="1150" b="0">
                           <a:solidFill>
                             <a:srgbClr val="212630"/>
                           </a:solidFill>
@@ -10975,7 +11250,7 @@
                       </a:r>
                     </a:p>
                   </a:txBody>
-                  <a:tcPr marL="118872" marR="91440" marT="45720" marB="45720" anchor="ctr">
+                  <a:tcPr marL="128016" marR="91440" marT="36576" marB="36576" anchor="ctr">
                     <a:solidFill>
                       <a:srgbClr val="F3F5F8"/>
                     </a:solidFill>
@@ -10988,7 +11263,7 @@
                     <a:p>
                       <a:pPr algn="l">
                         <a:lnSpc>
-                          <a:spcPct val="105000"/>
+                          <a:spcPct val="104000"/>
                         </a:lnSpc>
                         <a:spcBef>
                           <a:spcPts val="0"/>
@@ -10998,7 +11273,7 @@
                         </a:spcAft>
                       </a:pPr>
                       <a:r>
-                        <a:rPr sz="1100" b="0">
+                        <a:rPr sz="1150" b="0">
                           <a:solidFill>
                             <a:srgbClr val="212630"/>
                           </a:solidFill>
@@ -11008,14 +11283,14 @@
                       </a:r>
                     </a:p>
                   </a:txBody>
-                  <a:tcPr marL="118872" marR="91440" marT="45720" marB="45720" anchor="ctr">
+                  <a:tcPr marL="128016" marR="91440" marT="36576" marB="36576" anchor="ctr">
                     <a:solidFill>
                       <a:srgbClr val="F3F5F8"/>
                     </a:solidFill>
                   </a:tcPr>
                 </a:tc>
               </a:tr>
-              <a:tr h="758952">
+              <a:tr h="566928">
                 <a:tc>
                   <a:txBody>
                     <a:bodyPr wrap="square"/>
@@ -11023,7 +11298,7 @@
                     <a:p>
                       <a:pPr algn="l">
                         <a:lnSpc>
-                          <a:spcPct val="105000"/>
+                          <a:spcPct val="104000"/>
                         </a:lnSpc>
                         <a:spcBef>
                           <a:spcPts val="0"/>
@@ -11033,7 +11308,7 @@
                         </a:spcAft>
                       </a:pPr>
                       <a:r>
-                        <a:rPr sz="1100" b="0">
+                        <a:rPr sz="1150" b="0">
                           <a:solidFill>
                             <a:srgbClr val="212630"/>
                           </a:solidFill>
@@ -11043,7 +11318,7 @@
                       </a:r>
                     </a:p>
                   </a:txBody>
-                  <a:tcPr marL="118872" marR="91440" marT="45720" marB="45720" anchor="ctr">
+                  <a:tcPr marL="128016" marR="91440" marT="36576" marB="36576" anchor="ctr">
                     <a:solidFill>
                       <a:srgbClr val="FFFFFF"/>
                     </a:solidFill>
@@ -11056,7 +11331,7 @@
                     <a:p>
                       <a:pPr algn="l">
                         <a:lnSpc>
-                          <a:spcPct val="105000"/>
+                          <a:spcPct val="104000"/>
                         </a:lnSpc>
                         <a:spcBef>
                           <a:spcPts val="0"/>
@@ -11066,17 +11341,17 @@
                         </a:spcAft>
                       </a:pPr>
                       <a:r>
-                        <a:rPr sz="1100" b="0">
+                        <a:rPr sz="1150" b="0">
                           <a:solidFill>
                             <a:srgbClr val="212630"/>
                           </a:solidFill>
                           <a:latin typeface="Segoe UI"/>
                         </a:rPr>
-                        <a:t>Cloudflare never renders the Turnstile frame in an automated browser — nothing was measured, and the test could not fail.</a:t>
+                        <a:t>Turnstile never renders in an automated browser; nothing was measured.</a:t>
                       </a:r>
                     </a:p>
                   </a:txBody>
-                  <a:tcPr marL="118872" marR="91440" marT="45720" marB="45720" anchor="ctr">
+                  <a:tcPr marL="128016" marR="91440" marT="36576" marB="36576" anchor="ctr">
                     <a:solidFill>
                       <a:srgbClr val="FFFFFF"/>
                     </a:solidFill>
@@ -11089,7 +11364,7 @@
                     <a:p>
                       <a:pPr algn="l">
                         <a:lnSpc>
-                          <a:spcPct val="105000"/>
+                          <a:spcPct val="104000"/>
                         </a:lnSpc>
                         <a:spcBef>
                           <a:spcPts val="0"/>
@@ -11099,7 +11374,7 @@
                         </a:spcAft>
                       </a:pPr>
                       <a:r>
-                        <a:rPr sz="1100" b="0">
+                        <a:rPr sz="1150" b="0">
                           <a:solidFill>
                             <a:srgbClr val="212630"/>
                           </a:solidFill>
@@ -11109,9 +11384,110 @@
                       </a:r>
                     </a:p>
                   </a:txBody>
-                  <a:tcPr marL="118872" marR="91440" marT="45720" marB="45720" anchor="ctr">
+                  <a:tcPr marL="128016" marR="91440" marT="36576" marB="36576" anchor="ctr">
                     <a:solidFill>
                       <a:srgbClr val="FFFFFF"/>
+                    </a:solidFill>
+                  </a:tcPr>
+                </a:tc>
+              </a:tr>
+              <a:tr h="566928">
+                <a:tc>
+                  <a:txBody>
+                    <a:bodyPr wrap="square"/>
+                    <a:lstStyle/>
+                    <a:p>
+                      <a:pPr algn="l">
+                        <a:lnSpc>
+                          <a:spcPct val="104000"/>
+                        </a:lnSpc>
+                        <a:spcBef>
+                          <a:spcPts val="0"/>
+                        </a:spcBef>
+                        <a:spcAft>
+                          <a:spcPts val="0"/>
+                        </a:spcAft>
+                      </a:pPr>
+                      <a:r>
+                        <a:rPr sz="1150" b="0">
+                          <a:solidFill>
+                            <a:srgbClr val="212630"/>
+                          </a:solidFill>
+                          <a:latin typeface="Segoe UI"/>
+                        </a:rPr>
+                        <a:t>The capability looked fine</a:t>
+                      </a:r>
+                    </a:p>
+                  </a:txBody>
+                  <a:tcPr marL="128016" marR="91440" marT="36576" marB="36576" anchor="ctr">
+                    <a:solidFill>
+                      <a:srgbClr val="F3F5F8"/>
+                    </a:solidFill>
+                  </a:tcPr>
+                </a:tc>
+                <a:tc>
+                  <a:txBody>
+                    <a:bodyPr wrap="square"/>
+                    <a:lstStyle/>
+                    <a:p>
+                      <a:pPr algn="l">
+                        <a:lnSpc>
+                          <a:spcPct val="104000"/>
+                        </a:lnSpc>
+                        <a:spcBef>
+                          <a:spcPts val="0"/>
+                        </a:spcBef>
+                        <a:spcAft>
+                          <a:spcPts val="0"/>
+                        </a:spcAft>
+                      </a:pPr>
+                      <a:r>
+                        <a:rPr sz="1150" b="0">
+                          <a:solidFill>
+                            <a:srgbClr val="212630"/>
+                          </a:solidFill>
+                          <a:latin typeface="Segoe UI"/>
+                        </a:rPr>
+                        <a:t>A private helper was offered as a capability the model could call.</a:t>
+                      </a:r>
+                    </a:p>
+                  </a:txBody>
+                  <a:tcPr marL="128016" marR="91440" marT="36576" marB="36576" anchor="ctr">
+                    <a:solidFill>
+                      <a:srgbClr val="F3F5F8"/>
+                    </a:solidFill>
+                  </a:tcPr>
+                </a:tc>
+                <a:tc>
+                  <a:txBody>
+                    <a:bodyPr wrap="square"/>
+                    <a:lstStyle/>
+                    <a:p>
+                      <a:pPr algn="l">
+                        <a:lnSpc>
+                          <a:spcPct val="104000"/>
+                        </a:lnSpc>
+                        <a:spcBef>
+                          <a:spcPts val="0"/>
+                        </a:spcBef>
+                        <a:spcAft>
+                          <a:spcPts val="0"/>
+                        </a:spcAft>
+                      </a:pPr>
+                      <a:r>
+                        <a:rPr sz="1150" b="0">
+                          <a:solidFill>
+                            <a:srgbClr val="212630"/>
+                          </a:solidFill>
+                          <a:latin typeface="Segoe UI"/>
+                        </a:rPr>
+                        <a:t>Only public members are advertised</a:t>
+                      </a:r>
+                    </a:p>
+                  </a:txBody>
+                  <a:tcPr marL="128016" marR="91440" marT="36576" marB="36576" anchor="ctr">
+                    <a:solidFill>
+                      <a:srgbClr val="F3F5F8"/>
                     </a:solidFill>
                   </a:tcPr>
                 </a:tc>
@@ -11128,8 +11504,8 @@
         </p:nvSpPr>
         <p:spPr>
           <a:xfrm>
-            <a:off x="566928" y="5989320"/>
-            <a:ext cx="11057839" cy="548640"/>
+            <a:off x="566928" y="5797296"/>
+            <a:ext cx="11057839" cy="566928"/>
           </a:xfrm>
           <a:prstGeom prst="roundRect">
             <a:avLst>
@@ -11174,14 +11550,14 @@
         </p:nvSpPr>
         <p:spPr>
           <a:xfrm>
-            <a:off x="566928" y="5989320"/>
-            <a:ext cx="68580" cy="548640"/>
+            <a:off x="566928" y="5797296"/>
+            <a:ext cx="64008" cy="566928"/>
           </a:xfrm>
           <a:prstGeom prst="rect">
             <a:avLst/>
           </a:prstGeom>
           <a:solidFill>
-            <a:srgbClr val="2EAD33"/>
+            <a:srgbClr val="43B7DC"/>
           </a:solidFill>
           <a:ln>
             <a:noFill/>
@@ -11218,8 +11594,8 @@
         </p:nvSpPr>
         <p:spPr>
           <a:xfrm>
-            <a:off x="822960" y="6039612"/>
-            <a:ext cx="10600639" cy="448056"/>
+            <a:off x="804672" y="5843016"/>
+            <a:ext cx="10637215" cy="475488"/>
           </a:xfrm>
           <a:prstGeom prst="rect">
             <a:avLst/>
@@ -11234,7 +11610,7 @@
           <a:p>
             <a:pPr algn="l">
               <a:lnSpc>
-                <a:spcPct val="115000"/>
+                <a:spcPct val="112000"/>
               </a:lnSpc>
               <a:spcBef>
                 <a:spcPts val="0"/>
@@ -11244,22 +11620,22 @@
               </a:spcAft>
             </a:pPr>
             <a:r>
-              <a:rPr sz="1350" b="1">
+              <a:rPr sz="1500" b="1">
                 <a:solidFill>
                   <a:srgbClr val="212630"/>
                 </a:solidFill>
                 <a:latin typeface="Segoe UI"/>
               </a:rPr>
-              <a:t>So: </a:t>
-            </a:r>
-            <a:r>
-              <a:rPr sz="1350" b="0">
+              <a:t>Every gate here is a matcher over the output. </a:t>
+            </a:r>
+            <a:r>
+              <a:rPr sz="1500" b="0">
                 <a:solidFill>
                   <a:srgbClr val="626B7A"/>
                 </a:solidFill>
                 <a:latin typeface="Segoe UI"/>
               </a:rPr>
-              <a:t>every gate here is a matcher over the output — not an instruction in a prompt. A prompt forbidding something is a suggestion; a matcher is enforcement.</a:t>
+              <a:t>A prompt forbidding something is a suggestion; a matcher is enforcement.</a:t>
             </a:r>
           </a:p>
         </p:txBody>
@@ -11272,8 +11648,8 @@
         </p:nvSpPr>
         <p:spPr>
           <a:xfrm>
-            <a:off x="566928" y="6382512"/>
-            <a:ext cx="11057839" cy="274320"/>
+            <a:off x="566928" y="6419088"/>
+            <a:ext cx="11057839" cy="256032"/>
           </a:xfrm>
           <a:prstGeom prst="rect">
             <a:avLst/>
@@ -11341,7 +11717,7 @@
         </p:nvSpPr>
         <p:spPr>
           <a:xfrm>
-            <a:off x="566928" y="384048"/>
+            <a:off x="566928" y="365760"/>
             <a:ext cx="11057839" cy="658368"/>
           </a:xfrm>
           <a:prstGeom prst="rect">
@@ -11364,7 +11740,7 @@
               </a:spcAft>
             </a:pPr>
             <a:r>
-              <a:rPr sz="2900" b="0">
+              <a:rPr sz="2700" b="0">
                 <a:solidFill>
                   <a:srgbClr val="171B23"/>
                 </a:solidFill>
@@ -11383,9 +11759,9 @@
               </a:spcAft>
             </a:pPr>
             <a:r>
-              <a:rPr sz="1250" b="0">
-                <a:solidFill>
-                  <a:srgbClr val="1E7A22"/>
+              <a:rPr sz="1150" b="0">
+                <a:solidFill>
+                  <a:srgbClr val="9AA2AE"/>
                 </a:solidFill>
                 <a:latin typeface="Segoe UI"/>
               </a:rPr>
@@ -11402,8 +11778,8 @@
         </p:nvSpPr>
         <p:spPr>
           <a:xfrm>
-            <a:off x="566928" y="1060704"/>
-            <a:ext cx="1051560" cy="50292"/>
+            <a:off x="566928" y="1042415"/>
+            <a:ext cx="777240" cy="41148"/>
           </a:xfrm>
           <a:prstGeom prst="roundRect">
             <a:avLst>
@@ -11411,7 +11787,7 @@
             </a:avLst>
           </a:prstGeom>
           <a:solidFill>
-            <a:srgbClr val="2EAD33"/>
+            <a:srgbClr val="43B7DC"/>
           </a:solidFill>
           <a:ln>
             <a:noFill/>
@@ -11448,8 +11824,8 @@
         </p:nvSpPr>
         <p:spPr>
           <a:xfrm>
-            <a:off x="566928" y="1645920"/>
-            <a:ext cx="5277459" cy="3200400"/>
+            <a:off x="566928" y="1444752"/>
+            <a:ext cx="5277459" cy="3182112"/>
           </a:xfrm>
           <a:prstGeom prst="roundRect">
             <a:avLst>
@@ -11496,14 +11872,14 @@
         </p:nvSpPr>
         <p:spPr>
           <a:xfrm>
-            <a:off x="566928" y="1645920"/>
+            <a:off x="566928" y="1444752"/>
             <a:ext cx="5277459" cy="68580"/>
           </a:xfrm>
           <a:prstGeom prst="rect">
             <a:avLst/>
           </a:prstGeom>
           <a:solidFill>
-            <a:srgbClr val="2C7FB8"/>
+            <a:srgbClr val="3A539E"/>
           </a:solidFill>
           <a:ln>
             <a:noFill/>
@@ -11540,7 +11916,7 @@
         </p:nvSpPr>
         <p:spPr>
           <a:xfrm>
-            <a:off x="841247" y="1874519"/>
+            <a:off x="841247" y="1682496"/>
             <a:ext cx="4728819" cy="2834640"/>
           </a:xfrm>
           <a:prstGeom prst="rect">
@@ -11559,13 +11935,13 @@
                 <a:spcPts val="0"/>
               </a:spcBef>
               <a:spcAft>
-                <a:spcPts val="1100"/>
+                <a:spcPts val="1200"/>
               </a:spcAft>
             </a:pPr>
             <a:r>
               <a:rPr sz="1500" b="0">
                 <a:solidFill>
-                  <a:srgbClr val="2C7FB8"/>
+                  <a:srgbClr val="3A539E"/>
                 </a:solidFill>
                 <a:latin typeface="Segoe UI"/>
               </a:rPr>
@@ -11573,107 +11949,133 @@
             </a:r>
           </a:p>
           <a:p>
-            <a:pPr marL="237744" indent="-237744">
-              <a:spcAft>
-                <a:spcPts val="800"/>
+            <a:pPr marL="292608" indent="-292608">
+              <a:spcAft>
+                <a:spcPts val="1000"/>
               </a:spcAft>
               <a:buNone/>
             </a:pPr>
             <a:r>
-              <a:rPr sz="1250" b="1">
-                <a:solidFill>
-                  <a:srgbClr val="2C7FB8"/>
+              <a:rPr sz="1450" b="1">
+                <a:solidFill>
+                  <a:srgbClr val="3A539E"/>
                 </a:solidFill>
                 <a:latin typeface="Segoe UI"/>
               </a:rPr>
               <a:t>▪   </a:t>
             </a:r>
             <a:r>
-              <a:rPr sz="1250">
+              <a:rPr sz="1450">
                 <a:solidFill>
                   <a:srgbClr val="212630"/>
                 </a:solidFill>
                 <a:latin typeface="Segoe UI"/>
               </a:rPr>
-              <a:t>Draft scenarios from the issue and the diff (stage 1)</a:t>
-            </a:r>
-          </a:p>
-          <a:p>
-            <a:pPr marL="237744" indent="-237744">
-              <a:spcAft>
-                <a:spcPts val="800"/>
+              <a:t>Draft scenarios from the issue and the diff (1)</a:t>
+            </a:r>
+          </a:p>
+          <a:p>
+            <a:pPr marL="292608" indent="-292608">
+              <a:spcAft>
+                <a:spcPts val="1000"/>
               </a:spcAft>
               <a:buNone/>
             </a:pPr>
             <a:r>
-              <a:rPr sz="1250" b="1">
-                <a:solidFill>
-                  <a:srgbClr val="2C7FB8"/>
+              <a:rPr sz="1450" b="1">
+                <a:solidFill>
+                  <a:srgbClr val="3A539E"/>
                 </a:solidFill>
                 <a:latin typeface="Segoe UI"/>
               </a:rPr>
               <a:t>▪   </a:t>
             </a:r>
             <a:r>
-              <a:rPr sz="1250">
+              <a:rPr sz="1450">
                 <a:solidFill>
                   <a:srgbClr val="212630"/>
                 </a:solidFill>
                 <a:latin typeface="Segoe UI"/>
               </a:rPr>
-              <a:t>Write the test block from the scenario (stage 2)</a:t>
-            </a:r>
-          </a:p>
-          <a:p>
-            <a:pPr marL="237744" indent="-237744">
-              <a:spcAft>
-                <a:spcPts val="800"/>
+              <a:t>Write the test block from the scenario (2)</a:t>
+            </a:r>
+          </a:p>
+          <a:p>
+            <a:pPr marL="292608" indent="-292608">
+              <a:spcAft>
+                <a:spcPts val="1000"/>
               </a:spcAft>
               <a:buNone/>
             </a:pPr>
             <a:r>
-              <a:rPr sz="1250" b="1">
-                <a:solidFill>
-                  <a:srgbClr val="2C7FB8"/>
+              <a:rPr sz="1450" b="1">
+                <a:solidFill>
+                  <a:srgbClr val="3A539E"/>
                 </a:solidFill>
                 <a:latin typeface="Segoe UI"/>
               </a:rPr>
               <a:t>▪   </a:t>
             </a:r>
             <a:r>
-              <a:rPr sz="1250">
+              <a:rPr sz="1450">
                 <a:solidFill>
                   <a:srgbClr val="212630"/>
                 </a:solidFill>
                 <a:latin typeface="Segoe UI"/>
               </a:rPr>
-              <a:t>Classify coverage and buildability; propose locators and methods (3–4)</a:t>
-            </a:r>
-          </a:p>
-          <a:p>
-            <a:pPr marL="237744" indent="-237744">
-              <a:spcAft>
-                <a:spcPts val="800"/>
+              <a:t>Judge coverage and buildability (3–4)</a:t>
+            </a:r>
+          </a:p>
+          <a:p>
+            <a:pPr marL="292608" indent="-292608">
+              <a:spcAft>
+                <a:spcPts val="1000"/>
               </a:spcAft>
               <a:buNone/>
             </a:pPr>
             <a:r>
-              <a:rPr sz="1250" b="1">
-                <a:solidFill>
-                  <a:srgbClr val="2C7FB8"/>
+              <a:rPr sz="1450" b="1">
+                <a:solidFill>
+                  <a:srgbClr val="3A539E"/>
                 </a:solidFill>
                 <a:latin typeface="Segoe UI"/>
               </a:rPr>
               <a:t>▪   </a:t>
             </a:r>
             <a:r>
-              <a:rPr sz="1250">
+              <a:rPr sz="1450">
                 <a:solidFill>
                   <a:srgbClr val="212630"/>
                 </a:solidFill>
                 <a:latin typeface="Segoe UI"/>
               </a:rPr>
-              <a:t>Read a feature area by driving the real app, and write down what it learned</a:t>
+              <a:t>Pick a scope — a CI-only change is a deployment check (5)</a:t>
+            </a:r>
+          </a:p>
+          <a:p>
+            <a:pPr marL="292608" indent="-292608">
+              <a:spcAft>
+                <a:spcPts val="1000"/>
+              </a:spcAft>
+              <a:buNone/>
+            </a:pPr>
+            <a:r>
+              <a:rPr sz="1450" b="1">
+                <a:solidFill>
+                  <a:srgbClr val="3A539E"/>
+                </a:solidFill>
+                <a:latin typeface="Segoe UI"/>
+              </a:rPr>
+              <a:t>▪   </a:t>
+            </a:r>
+            <a:r>
+              <a:rPr sz="1450">
+                <a:solidFill>
+                  <a:srgbClr val="212630"/>
+                </a:solidFill>
+                <a:latin typeface="Segoe UI"/>
+              </a:rPr>
+              <a:t>Read the app in a browser, record what it learned</a:t>
             </a:r>
           </a:p>
         </p:txBody>
@@ -11686,8 +12088,8 @@
         </p:nvSpPr>
         <p:spPr>
           <a:xfrm>
-            <a:off x="6347307" y="1645920"/>
-            <a:ext cx="5277459" cy="3200400"/>
+            <a:off x="6347307" y="1444752"/>
+            <a:ext cx="5277459" cy="3182112"/>
           </a:xfrm>
           <a:prstGeom prst="roundRect">
             <a:avLst>
@@ -11734,14 +12136,14 @@
         </p:nvSpPr>
         <p:spPr>
           <a:xfrm>
-            <a:off x="6347307" y="1645920"/>
+            <a:off x="6347307" y="1444752"/>
             <a:ext cx="5277459" cy="68580"/>
           </a:xfrm>
           <a:prstGeom prst="rect">
             <a:avLst/>
           </a:prstGeom>
           <a:solidFill>
-            <a:srgbClr val="1E7A22"/>
+            <a:srgbClr val="1C7896"/>
           </a:solidFill>
           <a:ln>
             <a:noFill/>
@@ -11778,7 +12180,7 @@
         </p:nvSpPr>
         <p:spPr>
           <a:xfrm>
-            <a:off x="6621627" y="1874519"/>
+            <a:off x="6621627" y="1682496"/>
             <a:ext cx="4728819" cy="2834640"/>
           </a:xfrm>
           <a:prstGeom prst="rect">
@@ -11797,13 +12199,13 @@
                 <a:spcPts val="0"/>
               </a:spcBef>
               <a:spcAft>
-                <a:spcPts val="1100"/>
+                <a:spcPts val="1200"/>
               </a:spcAft>
             </a:pPr>
             <a:r>
               <a:rPr sz="1500" b="0">
                 <a:solidFill>
-                  <a:srgbClr val="1E7A22"/>
+                  <a:srgbClr val="1C7896"/>
                 </a:solidFill>
                 <a:latin typeface="Segoe UI"/>
               </a:rPr>
@@ -11811,133 +12213,159 @@
             </a:r>
           </a:p>
           <a:p>
-            <a:pPr marL="237744" indent="-237744">
-              <a:spcAft>
-                <a:spcPts val="800"/>
+            <a:pPr marL="292608" indent="-292608">
+              <a:spcAft>
+                <a:spcPts val="1000"/>
               </a:spcAft>
               <a:buNone/>
             </a:pPr>
             <a:r>
-              <a:rPr sz="1250" b="1">
-                <a:solidFill>
-                  <a:srgbClr val="1E7A22"/>
+              <a:rPr sz="1450" b="1">
+                <a:solidFill>
+                  <a:srgbClr val="1C7896"/>
                 </a:solidFill>
                 <a:latin typeface="Segoe UI"/>
               </a:rPr>
               <a:t>▪   </a:t>
             </a:r>
             <a:r>
-              <a:rPr sz="1250">
+              <a:rPr sz="1450">
                 <a:solidFill>
                   <a:srgbClr val="212630"/>
                 </a:solidFill>
                 <a:latin typeface="Segoe UI"/>
               </a:rPr>
-              <a:t>The block hash decides hold / re-digest / classify: scenario text is the only lever</a:t>
-            </a:r>
-          </a:p>
-          <a:p>
-            <a:pPr marL="237744" indent="-237744">
-              <a:spcAft>
-                <a:spcPts val="800"/>
+              <a:t>The block hash decides hold / re-digest / classify</a:t>
+            </a:r>
+          </a:p>
+          <a:p>
+            <a:pPr marL="292608" indent="-292608">
+              <a:spcAft>
+                <a:spcPts val="1000"/>
               </a:spcAft>
               <a:buNone/>
             </a:pPr>
             <a:r>
-              <a:rPr sz="1250" b="1">
-                <a:solidFill>
-                  <a:srgbClr val="1E7A22"/>
+              <a:rPr sz="1450" b="1">
+                <a:solidFill>
+                  <a:srgbClr val="1C7896"/>
                 </a:solidFill>
                 <a:latin typeface="Segoe UI"/>
               </a:rPr>
               <a:t>▪   </a:t>
             </a:r>
             <a:r>
-              <a:rPr sz="1250">
+              <a:rPr sz="1450">
                 <a:solidFill>
                   <a:srgbClr val="212630"/>
                 </a:solidFill>
                 <a:latin typeface="Segoe UI"/>
               </a:rPr>
-              <a:t>Tags are re-applied from the scenario on every run, not remembered</a:t>
-            </a:r>
-          </a:p>
-          <a:p>
-            <a:pPr marL="237744" indent="-237744">
-              <a:spcAft>
-                <a:spcPts val="800"/>
+              <a:t>Tags re-applied from the scenario, every run</a:t>
+            </a:r>
+          </a:p>
+          <a:p>
+            <a:pPr marL="292608" indent="-292608">
+              <a:spcAft>
+                <a:spcPts val="1000"/>
               </a:spcAft>
               <a:buNone/>
             </a:pPr>
             <a:r>
-              <a:rPr sz="1250" b="1">
-                <a:solidFill>
-                  <a:srgbClr val="1E7A22"/>
+              <a:rPr sz="1450" b="1">
+                <a:solidFill>
+                  <a:srgbClr val="1C7896"/>
                 </a:solidFill>
                 <a:latin typeface="Segoe UI"/>
               </a:rPr>
               <a:t>▪   </a:t>
             </a:r>
             <a:r>
-              <a:rPr sz="1250">
+              <a:rPr sz="1450">
                 <a:solidFill>
                   <a:srgbClr val="212630"/>
                 </a:solidFill>
                 <a:latin typeface="Segoe UI"/>
               </a:rPr>
-              <a:t>Every claimed capability is matched against the real page-object surface</a:t>
-            </a:r>
-          </a:p>
-          <a:p>
-            <a:pPr marL="237744" indent="-237744">
-              <a:spcAft>
-                <a:spcPts val="800"/>
+              <a:t>Claimed capabilities matched against the real surface</a:t>
+            </a:r>
+          </a:p>
+          <a:p>
+            <a:pPr marL="292608" indent="-292608">
+              <a:spcAft>
+                <a:spcPts val="1000"/>
               </a:spcAft>
               <a:buNone/>
             </a:pPr>
             <a:r>
-              <a:rPr sz="1250" b="1">
-                <a:solidFill>
-                  <a:srgbClr val="1E7A22"/>
+              <a:rPr sz="1450" b="1">
+                <a:solidFill>
+                  <a:srgbClr val="1C7896"/>
                 </a:solidFill>
                 <a:latin typeface="Segoe UI"/>
               </a:rPr>
               <a:t>▪   </a:t>
             </a:r>
             <a:r>
-              <a:rPr sz="1250">
+              <a:rPr sz="1450">
                 <a:solidFill>
                   <a:srgbClr val="212630"/>
                 </a:solidFill>
                 <a:latin typeface="Segoe UI"/>
               </a:rPr>
-              <a:t>Generated code stays inside the managed region; agent writes are additive-only</a:t>
-            </a:r>
-          </a:p>
-          <a:p>
-            <a:pPr marL="237744" indent="-237744">
-              <a:spcAft>
-                <a:spcPts val="800"/>
+              <a:t>Generated code stays inside the managed region</a:t>
+            </a:r>
+          </a:p>
+          <a:p>
+            <a:pPr marL="292608" indent="-292608">
+              <a:spcAft>
+                <a:spcPts val="1000"/>
               </a:spcAft>
               <a:buNone/>
             </a:pPr>
             <a:r>
-              <a:rPr sz="1250" b="1">
-                <a:solidFill>
-                  <a:srgbClr val="1E7A22"/>
+              <a:rPr sz="1450" b="1">
+                <a:solidFill>
+                  <a:srgbClr val="1C7896"/>
                 </a:solidFill>
                 <a:latin typeface="Segoe UI"/>
               </a:rPr>
               <a:t>▪   </a:t>
             </a:r>
             <a:r>
-              <a:rPr sz="1250">
+              <a:rPr sz="1450">
                 <a:solidFill>
                   <a:srgbClr val="212630"/>
                 </a:solidFill>
                 <a:latin typeface="Segoe UI"/>
               </a:rPr>
-              <a:t>Degraded input fails open with a named reason; a malformed value throws</a:t>
+              <a:t>Degraded input fails open, named; malformed throws</a:t>
+            </a:r>
+          </a:p>
+          <a:p>
+            <a:pPr marL="292608" indent="-292608">
+              <a:spcAft>
+                <a:spcPts val="1000"/>
+              </a:spcAft>
+              <a:buNone/>
+            </a:pPr>
+            <a:r>
+              <a:rPr sz="1450" b="1">
+                <a:solidFill>
+                  <a:srgbClr val="1C7896"/>
+                </a:solidFill>
+                <a:latin typeface="Segoe UI"/>
+              </a:rPr>
+              <a:t>▪   </a:t>
+            </a:r>
+            <a:r>
+              <a:rPr sz="1450">
+                <a:solidFill>
+                  <a:srgbClr val="212630"/>
+                </a:solidFill>
+                <a:latin typeface="Segoe UI"/>
+              </a:rPr>
+              <a:t>A run that dies still sends its report</a:t>
             </a:r>
           </a:p>
         </p:txBody>
@@ -11950,8 +12378,8 @@
         </p:nvSpPr>
         <p:spPr>
           <a:xfrm>
-            <a:off x="566928" y="5029200"/>
-            <a:ext cx="11057839" cy="658368"/>
+            <a:off x="566928" y="4773168"/>
+            <a:ext cx="11057839" cy="676656"/>
           </a:xfrm>
           <a:prstGeom prst="roundRect">
             <a:avLst>
@@ -11996,14 +12424,14 @@
         </p:nvSpPr>
         <p:spPr>
           <a:xfrm>
-            <a:off x="566928" y="5029200"/>
-            <a:ext cx="68580" cy="658368"/>
+            <a:off x="566928" y="4773168"/>
+            <a:ext cx="64008" cy="676656"/>
           </a:xfrm>
           <a:prstGeom prst="rect">
             <a:avLst/>
           </a:prstGeom>
           <a:solidFill>
-            <a:srgbClr val="2EAD33"/>
+            <a:srgbClr val="43B7DC"/>
           </a:solidFill>
           <a:ln>
             <a:noFill/>
@@ -12040,8 +12468,8 @@
         </p:nvSpPr>
         <p:spPr>
           <a:xfrm>
-            <a:off x="822960" y="5079492"/>
-            <a:ext cx="10600639" cy="557784"/>
+            <a:off x="804672" y="4818888"/>
+            <a:ext cx="10637215" cy="585216"/>
           </a:xfrm>
           <a:prstGeom prst="rect">
             <a:avLst/>
@@ -12056,7 +12484,7 @@
           <a:p>
             <a:pPr algn="l">
               <a:lnSpc>
-                <a:spcPct val="115000"/>
+                <a:spcPct val="112000"/>
               </a:lnSpc>
               <a:spcBef>
                 <a:spcPts val="0"/>
@@ -12066,22 +12494,22 @@
               </a:spcAft>
             </a:pPr>
             <a:r>
-              <a:rPr sz="1350" b="1">
+              <a:rPr sz="1600" b="1">
                 <a:solidFill>
                   <a:srgbClr val="212630"/>
                 </a:solidFill>
                 <a:latin typeface="Segoe UI"/>
               </a:rPr>
-              <a:t>A prompt forbidding something is a suggestion. </a:t>
-            </a:r>
-            <a:r>
-              <a:rPr sz="1350" b="0">
+              <a:t>Two statuses, never one. </a:t>
+            </a:r>
+            <a:r>
+              <a:rPr sz="1600" b="0">
                 <a:solidFill>
                   <a:srgbClr val="626B7A"/>
                 </a:solidFill>
                 <a:latin typeface="Segoe UI"/>
               </a:rPr>
-              <a:t>The rule has to hold over the output — so it is a check that runs, and a report line that names what it refused.</a:t>
+              <a:t>Testing Status is the product · Pipeline Status is the process. A failed test leaves every stage succeeded.</a:t>
             </a:r>
           </a:p>
         </p:txBody>
@@ -12094,8 +12522,8 @@
         </p:nvSpPr>
         <p:spPr>
           <a:xfrm>
-            <a:off x="566928" y="5833872"/>
-            <a:ext cx="11057839" cy="640080"/>
+            <a:off x="566928" y="5559552"/>
+            <a:ext cx="11057839" cy="676656"/>
           </a:xfrm>
           <a:prstGeom prst="roundRect">
             <a:avLst>
@@ -12140,14 +12568,14 @@
         </p:nvSpPr>
         <p:spPr>
           <a:xfrm>
-            <a:off x="566928" y="5833872"/>
-            <a:ext cx="68580" cy="640080"/>
+            <a:off x="566928" y="5559552"/>
+            <a:ext cx="64008" cy="676656"/>
           </a:xfrm>
           <a:prstGeom prst="rect">
             <a:avLst/>
           </a:prstGeom>
           <a:solidFill>
-            <a:srgbClr val="2EAD33"/>
+            <a:srgbClr val="43B7DC"/>
           </a:solidFill>
           <a:ln>
             <a:noFill/>
@@ -12184,8 +12612,8 @@
         </p:nvSpPr>
         <p:spPr>
           <a:xfrm>
-            <a:off x="822960" y="5884164"/>
-            <a:ext cx="10600639" cy="539496"/>
+            <a:off x="804672" y="5605272"/>
+            <a:ext cx="10637215" cy="585216"/>
           </a:xfrm>
           <a:prstGeom prst="rect">
             <a:avLst/>
@@ -12200,7 +12628,7 @@
           <a:p>
             <a:pPr algn="l">
               <a:lnSpc>
-                <a:spcPct val="115000"/>
+                <a:spcPct val="112000"/>
               </a:lnSpc>
               <a:spcBef>
                 <a:spcPts val="0"/>
@@ -12210,22 +12638,31 @@
               </a:spcAft>
             </a:pPr>
             <a:r>
-              <a:rPr sz="1350" b="1">
-                <a:solidFill>
-                  <a:srgbClr val="1E7A22"/>
-                </a:solidFill>
-                <a:latin typeface="Segoe UI"/>
-              </a:rPr>
-              <a:t>60 invariants run in seconds, with no browser. </a:t>
-            </a:r>
-            <a:r>
-              <a:rPr sz="1350" b="0">
+              <a:rPr sz="1600" b="1">
+                <a:solidFill>
+                  <a:srgbClr val="1C7896"/>
+                </a:solidFill>
+                <a:latin typeface="Segoe UI"/>
+              </a:rPr>
+              <a:t>89 invariants run in seconds, no browser. </a:t>
+            </a:r>
+            <a:r>
+              <a:rPr sz="1600" b="0">
+                <a:solidFill>
+                  <a:srgbClr val="212630"/>
+                </a:solidFill>
+                <a:latin typeface="Segoe UI"/>
+              </a:rPr>
+              <a:t>npm run self-checks</a:t>
+            </a:r>
+            <a:r>
+              <a:rPr sz="1600" b="0">
                 <a:solidFill>
                   <a:srgbClr val="626B7A"/>
                 </a:solidFill>
                 <a:latin typeface="Segoe UI"/>
               </a:rPr>
-              <a:t>npm run self-checks — added whenever the failure would have been silent. That last clause is the whole rule.</a:t>
+              <a:t> — added whenever the failure would have been silent.</a:t>
             </a:r>
           </a:p>
         </p:txBody>
@@ -12238,8 +12675,8 @@
         </p:nvSpPr>
         <p:spPr>
           <a:xfrm>
-            <a:off x="566928" y="6382512"/>
-            <a:ext cx="11057839" cy="274320"/>
+            <a:off x="566928" y="6419088"/>
+            <a:ext cx="11057839" cy="256032"/>
           </a:xfrm>
           <a:prstGeom prst="rect">
             <a:avLst/>
